--- a/web/data/Schilder.pptx
+++ b/web/data/Schilder.pptx
@@ -9,32 +9,6 @@
     <p:sldId id="301" r:id="rId6"/>
     <p:sldId id="302" r:id="rId7"/>
     <p:sldId id="303" r:id="rId8"/>
-    <p:sldId id="275" r:id="rId9"/>
-    <p:sldId id="276" r:id="rId10"/>
-    <p:sldId id="277" r:id="rId11"/>
-    <p:sldId id="278" r:id="rId12"/>
-    <p:sldId id="279" r:id="rId13"/>
-    <p:sldId id="280" r:id="rId14"/>
-    <p:sldId id="281" r:id="rId15"/>
-    <p:sldId id="282" r:id="rId16"/>
-    <p:sldId id="283" r:id="rId17"/>
-    <p:sldId id="284" r:id="rId18"/>
-    <p:sldId id="285" r:id="rId19"/>
-    <p:sldId id="286" r:id="rId20"/>
-    <p:sldId id="287" r:id="rId21"/>
-    <p:sldId id="288" r:id="rId22"/>
-    <p:sldId id="289" r:id="rId23"/>
-    <p:sldId id="290" r:id="rId24"/>
-    <p:sldId id="291" r:id="rId25"/>
-    <p:sldId id="292" r:id="rId26"/>
-    <p:sldId id="293" r:id="rId27"/>
-    <p:sldId id="294" r:id="rId28"/>
-    <p:sldId id="295" r:id="rId29"/>
-    <p:sldId id="296" r:id="rId30"/>
-    <p:sldId id="297" r:id="rId31"/>
-    <p:sldId id="298" r:id="rId32"/>
-    <p:sldId id="299" r:id="rId33"/>
-    <p:sldId id="300" r:id="rId34"/>
   </p:sldIdLst>
   <p:sldSz cx="9906000" cy="6858000" type="A4"/>
   <p:notesSz cx="9872663" cy="6858000"/>
@@ -662,7 +636,7 @@
           <a:p>
             <a:fld id="{6B7517D2-85EB-4A80-AC58-5B8386CE342C}" type="datetimeFigureOut">
               <a:rPr lang="de-AT" smtClean="0"/>
-              <a:t>22.03.2026</a:t>
+              <a:t>10.04.2026</a:t>
             </a:fld>
             <a:endParaRPr lang="de-AT"/>
           </a:p>
@@ -832,7 +806,7 @@
           <a:p>
             <a:fld id="{6B7517D2-85EB-4A80-AC58-5B8386CE342C}" type="datetimeFigureOut">
               <a:rPr lang="de-AT" smtClean="0"/>
-              <a:t>22.03.2026</a:t>
+              <a:t>10.04.2026</a:t>
             </a:fld>
             <a:endParaRPr lang="de-AT"/>
           </a:p>
@@ -1012,7 +986,7 @@
           <a:p>
             <a:fld id="{6B7517D2-85EB-4A80-AC58-5B8386CE342C}" type="datetimeFigureOut">
               <a:rPr lang="de-AT" smtClean="0"/>
-              <a:t>22.03.2026</a:t>
+              <a:t>10.04.2026</a:t>
             </a:fld>
             <a:endParaRPr lang="de-AT"/>
           </a:p>
@@ -1182,7 +1156,7 @@
           <a:p>
             <a:fld id="{6B7517D2-85EB-4A80-AC58-5B8386CE342C}" type="datetimeFigureOut">
               <a:rPr lang="de-AT" smtClean="0"/>
-              <a:t>22.03.2026</a:t>
+              <a:t>10.04.2026</a:t>
             </a:fld>
             <a:endParaRPr lang="de-AT"/>
           </a:p>
@@ -1426,7 +1400,7 @@
           <a:p>
             <a:fld id="{6B7517D2-85EB-4A80-AC58-5B8386CE342C}" type="datetimeFigureOut">
               <a:rPr lang="de-AT" smtClean="0"/>
-              <a:t>22.03.2026</a:t>
+              <a:t>10.04.2026</a:t>
             </a:fld>
             <a:endParaRPr lang="de-AT"/>
           </a:p>
@@ -1658,7 +1632,7 @@
           <a:p>
             <a:fld id="{6B7517D2-85EB-4A80-AC58-5B8386CE342C}" type="datetimeFigureOut">
               <a:rPr lang="de-AT" smtClean="0"/>
-              <a:t>22.03.2026</a:t>
+              <a:t>10.04.2026</a:t>
             </a:fld>
             <a:endParaRPr lang="de-AT"/>
           </a:p>
@@ -2025,7 +1999,7 @@
           <a:p>
             <a:fld id="{6B7517D2-85EB-4A80-AC58-5B8386CE342C}" type="datetimeFigureOut">
               <a:rPr lang="de-AT" smtClean="0"/>
-              <a:t>22.03.2026</a:t>
+              <a:t>10.04.2026</a:t>
             </a:fld>
             <a:endParaRPr lang="de-AT"/>
           </a:p>
@@ -2143,7 +2117,7 @@
           <a:p>
             <a:fld id="{6B7517D2-85EB-4A80-AC58-5B8386CE342C}" type="datetimeFigureOut">
               <a:rPr lang="de-AT" smtClean="0"/>
-              <a:t>22.03.2026</a:t>
+              <a:t>10.04.2026</a:t>
             </a:fld>
             <a:endParaRPr lang="de-AT"/>
           </a:p>
@@ -2238,7 +2212,7 @@
           <a:p>
             <a:fld id="{6B7517D2-85EB-4A80-AC58-5B8386CE342C}" type="datetimeFigureOut">
               <a:rPr lang="de-AT" smtClean="0"/>
-              <a:t>22.03.2026</a:t>
+              <a:t>10.04.2026</a:t>
             </a:fld>
             <a:endParaRPr lang="de-AT"/>
           </a:p>
@@ -2515,7 +2489,7 @@
           <a:p>
             <a:fld id="{6B7517D2-85EB-4A80-AC58-5B8386CE342C}" type="datetimeFigureOut">
               <a:rPr lang="de-AT" smtClean="0"/>
-              <a:t>22.03.2026</a:t>
+              <a:t>10.04.2026</a:t>
             </a:fld>
             <a:endParaRPr lang="de-AT"/>
           </a:p>
@@ -2772,7 +2746,7 @@
           <a:p>
             <a:fld id="{6B7517D2-85EB-4A80-AC58-5B8386CE342C}" type="datetimeFigureOut">
               <a:rPr lang="de-AT" smtClean="0"/>
-              <a:t>22.03.2026</a:t>
+              <a:t>10.04.2026</a:t>
             </a:fld>
             <a:endParaRPr lang="de-AT"/>
           </a:p>
@@ -2985,7 +2959,7 @@
           <a:p>
             <a:fld id="{6B7517D2-85EB-4A80-AC58-5B8386CE342C}" type="datetimeFigureOut">
               <a:rPr lang="de-AT" smtClean="0"/>
-              <a:t>22.03.2026</a:t>
+              <a:t>10.04.2026</a:t>
             </a:fld>
             <a:endParaRPr lang="de-AT"/>
           </a:p>
@@ -3553,1224 +3527,6 @@
 </p:sld>
 </file>
 
-<file path=ppt/slides/slide10.xml><?xml version="1.0" encoding="utf-8"?>
-<p:sld xmlns:a="http://schemas.openxmlformats.org/drawingml/2006/main" xmlns:r="http://schemas.openxmlformats.org/officeDocument/2006/relationships" xmlns:p="http://schemas.openxmlformats.org/presentationml/2006/main">
-  <p:cSld>
-    <p:spTree>
-      <p:nvGrpSpPr>
-        <p:cNvPr id="1" name=""/>
-        <p:cNvGrpSpPr/>
-        <p:nvPr/>
-      </p:nvGrpSpPr>
-      <p:grpSpPr>
-        <a:xfrm>
-          <a:off x="0" y="0"/>
-          <a:ext cx="0" cy="0"/>
-          <a:chOff x="0" y="0"/>
-          <a:chExt cx="0" cy="0"/>
-        </a:xfrm>
-      </p:grpSpPr>
-      <p:sp>
-        <p:nvSpPr>
-          <p:cNvPr id="2" name="Textfeld 1"/>
-          <p:cNvSpPr txBox="1"/>
-          <p:nvPr/>
-        </p:nvSpPr>
-        <p:spPr>
-          <a:xfrm>
-            <a:off x="1" y="362309"/>
-            <a:ext cx="9905999" cy="5709255"/>
-          </a:xfrm>
-          <a:prstGeom prst="rect">
-            <a:avLst/>
-          </a:prstGeom>
-          <a:noFill/>
-        </p:spPr>
-        <p:txBody>
-          <a:bodyPr wrap="square" rtlCol="0">
-            <a:spAutoFit/>
-          </a:bodyPr>
-          <a:lstStyle/>
-          <a:p>
-            <a:pPr algn="ctr"/>
-            <a:r>
-              <a:rPr lang="de-AT" sz="19900" b="1" dirty="0"/>
-              <a:t>ID</a:t>
-            </a:r>
-          </a:p>
-          <a:p>
-            <a:pPr algn="ctr"/>
-            <a:r>
-              <a:rPr lang="de-AT" sz="16600" b="1" dirty="0"/>
-              <a:t>100 - 119</a:t>
-            </a:r>
-            <a:endParaRPr lang="de-AT" sz="19900" b="1" dirty="0"/>
-          </a:p>
-        </p:txBody>
-      </p:sp>
-      <p:sp>
-        <p:nvSpPr>
-          <p:cNvPr id="3" name="Rechteck 2">
-            <a:extLst>
-              <a:ext uri="{FF2B5EF4-FFF2-40B4-BE49-F238E27FC236}">
-                <a16:creationId xmlns:a16="http://schemas.microsoft.com/office/drawing/2014/main" id="{8C74AAB0-481A-410D-B16C-BFB94CB9706D}"/>
-              </a:ext>
-            </a:extLst>
-          </p:cNvPr>
-          <p:cNvSpPr/>
-          <p:nvPr/>
-        </p:nvSpPr>
-        <p:spPr>
-          <a:xfrm>
-            <a:off x="265814" y="191386"/>
-            <a:ext cx="9409814" cy="6464595"/>
-          </a:xfrm>
-          <a:prstGeom prst="rect">
-            <a:avLst/>
-          </a:prstGeom>
-          <a:noFill/>
-          <a:ln w="127000">
-            <a:solidFill>
-              <a:srgbClr val="00B050"/>
-            </a:solidFill>
-          </a:ln>
-        </p:spPr>
-        <p:style>
-          <a:lnRef idx="2">
-            <a:schemeClr val="accent1">
-              <a:shade val="50000"/>
-            </a:schemeClr>
-          </a:lnRef>
-          <a:fillRef idx="1">
-            <a:schemeClr val="accent1"/>
-          </a:fillRef>
-          <a:effectRef idx="0">
-            <a:schemeClr val="accent1"/>
-          </a:effectRef>
-          <a:fontRef idx="minor">
-            <a:schemeClr val="lt1"/>
-          </a:fontRef>
-        </p:style>
-        <p:txBody>
-          <a:bodyPr rtlCol="0" anchor="ctr"/>
-          <a:lstStyle/>
-          <a:p>
-            <a:pPr algn="ctr"/>
-            <a:endParaRPr lang="de-AT"/>
-          </a:p>
-        </p:txBody>
-      </p:sp>
-    </p:spTree>
-    <p:extLst>
-      <p:ext uri="{BB962C8B-B14F-4D97-AF65-F5344CB8AC3E}">
-        <p14:creationId xmlns:p14="http://schemas.microsoft.com/office/powerpoint/2010/main" val="4110117008"/>
-      </p:ext>
-    </p:extLst>
-  </p:cSld>
-  <p:clrMapOvr>
-    <a:masterClrMapping/>
-  </p:clrMapOvr>
-</p:sld>
-</file>
-
-<file path=ppt/slides/slide11.xml><?xml version="1.0" encoding="utf-8"?>
-<p:sld xmlns:a="http://schemas.openxmlformats.org/drawingml/2006/main" xmlns:r="http://schemas.openxmlformats.org/officeDocument/2006/relationships" xmlns:p="http://schemas.openxmlformats.org/presentationml/2006/main">
-  <p:cSld>
-    <p:spTree>
-      <p:nvGrpSpPr>
-        <p:cNvPr id="1" name=""/>
-        <p:cNvGrpSpPr/>
-        <p:nvPr/>
-      </p:nvGrpSpPr>
-      <p:grpSpPr>
-        <a:xfrm>
-          <a:off x="0" y="0"/>
-          <a:ext cx="0" cy="0"/>
-          <a:chOff x="0" y="0"/>
-          <a:chExt cx="0" cy="0"/>
-        </a:xfrm>
-      </p:grpSpPr>
-      <p:sp>
-        <p:nvSpPr>
-          <p:cNvPr id="2" name="Textfeld 1"/>
-          <p:cNvSpPr txBox="1"/>
-          <p:nvPr/>
-        </p:nvSpPr>
-        <p:spPr>
-          <a:xfrm>
-            <a:off x="17721" y="388189"/>
-            <a:ext cx="9905999" cy="5709255"/>
-          </a:xfrm>
-          <a:prstGeom prst="rect">
-            <a:avLst/>
-          </a:prstGeom>
-          <a:noFill/>
-        </p:spPr>
-        <p:txBody>
-          <a:bodyPr wrap="square" rtlCol="0">
-            <a:spAutoFit/>
-          </a:bodyPr>
-          <a:lstStyle/>
-          <a:p>
-            <a:pPr algn="ctr"/>
-            <a:r>
-              <a:rPr lang="de-AT" sz="19900" b="1" dirty="0"/>
-              <a:t>ID</a:t>
-            </a:r>
-          </a:p>
-          <a:p>
-            <a:pPr algn="ctr"/>
-            <a:r>
-              <a:rPr lang="de-AT" sz="16600" b="1" dirty="0"/>
-              <a:t>120 - 139</a:t>
-            </a:r>
-            <a:endParaRPr lang="de-AT" sz="19900" b="1" dirty="0"/>
-          </a:p>
-        </p:txBody>
-      </p:sp>
-      <p:sp>
-        <p:nvSpPr>
-          <p:cNvPr id="3" name="Rechteck 2">
-            <a:extLst>
-              <a:ext uri="{FF2B5EF4-FFF2-40B4-BE49-F238E27FC236}">
-                <a16:creationId xmlns:a16="http://schemas.microsoft.com/office/drawing/2014/main" id="{8C74AAB0-481A-410D-B16C-BFB94CB9706D}"/>
-              </a:ext>
-            </a:extLst>
-          </p:cNvPr>
-          <p:cNvSpPr/>
-          <p:nvPr/>
-        </p:nvSpPr>
-        <p:spPr>
-          <a:xfrm>
-            <a:off x="265814" y="191386"/>
-            <a:ext cx="9409814" cy="6464595"/>
-          </a:xfrm>
-          <a:prstGeom prst="rect">
-            <a:avLst/>
-          </a:prstGeom>
-          <a:noFill/>
-          <a:ln w="127000">
-            <a:solidFill>
-              <a:srgbClr val="00B050"/>
-            </a:solidFill>
-          </a:ln>
-        </p:spPr>
-        <p:style>
-          <a:lnRef idx="2">
-            <a:schemeClr val="accent1">
-              <a:shade val="50000"/>
-            </a:schemeClr>
-          </a:lnRef>
-          <a:fillRef idx="1">
-            <a:schemeClr val="accent1"/>
-          </a:fillRef>
-          <a:effectRef idx="0">
-            <a:schemeClr val="accent1"/>
-          </a:effectRef>
-          <a:fontRef idx="minor">
-            <a:schemeClr val="lt1"/>
-          </a:fontRef>
-        </p:style>
-        <p:txBody>
-          <a:bodyPr rtlCol="0" anchor="ctr"/>
-          <a:lstStyle/>
-          <a:p>
-            <a:pPr algn="ctr"/>
-            <a:endParaRPr lang="de-AT"/>
-          </a:p>
-        </p:txBody>
-      </p:sp>
-    </p:spTree>
-    <p:extLst>
-      <p:ext uri="{BB962C8B-B14F-4D97-AF65-F5344CB8AC3E}">
-        <p14:creationId xmlns:p14="http://schemas.microsoft.com/office/powerpoint/2010/main" val="2949541803"/>
-      </p:ext>
-    </p:extLst>
-  </p:cSld>
-  <p:clrMapOvr>
-    <a:masterClrMapping/>
-  </p:clrMapOvr>
-</p:sld>
-</file>
-
-<file path=ppt/slides/slide12.xml><?xml version="1.0" encoding="utf-8"?>
-<p:sld xmlns:a="http://schemas.openxmlformats.org/drawingml/2006/main" xmlns:r="http://schemas.openxmlformats.org/officeDocument/2006/relationships" xmlns:p="http://schemas.openxmlformats.org/presentationml/2006/main">
-  <p:cSld>
-    <p:spTree>
-      <p:nvGrpSpPr>
-        <p:cNvPr id="1" name=""/>
-        <p:cNvGrpSpPr/>
-        <p:nvPr/>
-      </p:nvGrpSpPr>
-      <p:grpSpPr>
-        <a:xfrm>
-          <a:off x="0" y="0"/>
-          <a:ext cx="0" cy="0"/>
-          <a:chOff x="0" y="0"/>
-          <a:chExt cx="0" cy="0"/>
-        </a:xfrm>
-      </p:grpSpPr>
-      <p:sp>
-        <p:nvSpPr>
-          <p:cNvPr id="2" name="Textfeld 1"/>
-          <p:cNvSpPr txBox="1"/>
-          <p:nvPr/>
-        </p:nvSpPr>
-        <p:spPr>
-          <a:xfrm>
-            <a:off x="17721" y="379562"/>
-            <a:ext cx="9905999" cy="5709255"/>
-          </a:xfrm>
-          <a:prstGeom prst="rect">
-            <a:avLst/>
-          </a:prstGeom>
-          <a:noFill/>
-        </p:spPr>
-        <p:txBody>
-          <a:bodyPr wrap="square" rtlCol="0">
-            <a:spAutoFit/>
-          </a:bodyPr>
-          <a:lstStyle/>
-          <a:p>
-            <a:pPr algn="ctr"/>
-            <a:r>
-              <a:rPr lang="de-AT" sz="19900" b="1" dirty="0"/>
-              <a:t>ID</a:t>
-            </a:r>
-          </a:p>
-          <a:p>
-            <a:pPr algn="ctr"/>
-            <a:r>
-              <a:rPr lang="de-AT" sz="16600" b="1" dirty="0"/>
-              <a:t>140 - 159</a:t>
-            </a:r>
-            <a:endParaRPr lang="de-AT" sz="19900" b="1" dirty="0"/>
-          </a:p>
-        </p:txBody>
-      </p:sp>
-      <p:sp>
-        <p:nvSpPr>
-          <p:cNvPr id="3" name="Rechteck 2">
-            <a:extLst>
-              <a:ext uri="{FF2B5EF4-FFF2-40B4-BE49-F238E27FC236}">
-                <a16:creationId xmlns:a16="http://schemas.microsoft.com/office/drawing/2014/main" id="{8C74AAB0-481A-410D-B16C-BFB94CB9706D}"/>
-              </a:ext>
-            </a:extLst>
-          </p:cNvPr>
-          <p:cNvSpPr/>
-          <p:nvPr/>
-        </p:nvSpPr>
-        <p:spPr>
-          <a:xfrm>
-            <a:off x="265814" y="191386"/>
-            <a:ext cx="9409814" cy="6464595"/>
-          </a:xfrm>
-          <a:prstGeom prst="rect">
-            <a:avLst/>
-          </a:prstGeom>
-          <a:noFill/>
-          <a:ln w="127000">
-            <a:solidFill>
-              <a:srgbClr val="00B050"/>
-            </a:solidFill>
-          </a:ln>
-        </p:spPr>
-        <p:style>
-          <a:lnRef idx="2">
-            <a:schemeClr val="accent1">
-              <a:shade val="50000"/>
-            </a:schemeClr>
-          </a:lnRef>
-          <a:fillRef idx="1">
-            <a:schemeClr val="accent1"/>
-          </a:fillRef>
-          <a:effectRef idx="0">
-            <a:schemeClr val="accent1"/>
-          </a:effectRef>
-          <a:fontRef idx="minor">
-            <a:schemeClr val="lt1"/>
-          </a:fontRef>
-        </p:style>
-        <p:txBody>
-          <a:bodyPr rtlCol="0" anchor="ctr"/>
-          <a:lstStyle/>
-          <a:p>
-            <a:pPr algn="ctr"/>
-            <a:endParaRPr lang="de-AT"/>
-          </a:p>
-        </p:txBody>
-      </p:sp>
-    </p:spTree>
-    <p:extLst>
-      <p:ext uri="{BB962C8B-B14F-4D97-AF65-F5344CB8AC3E}">
-        <p14:creationId xmlns:p14="http://schemas.microsoft.com/office/powerpoint/2010/main" val="114740457"/>
-      </p:ext>
-    </p:extLst>
-  </p:cSld>
-  <p:clrMapOvr>
-    <a:masterClrMapping/>
-  </p:clrMapOvr>
-</p:sld>
-</file>
-
-<file path=ppt/slides/slide13.xml><?xml version="1.0" encoding="utf-8"?>
-<p:sld xmlns:a="http://schemas.openxmlformats.org/drawingml/2006/main" xmlns:r="http://schemas.openxmlformats.org/officeDocument/2006/relationships" xmlns:p="http://schemas.openxmlformats.org/presentationml/2006/main">
-  <p:cSld>
-    <p:spTree>
-      <p:nvGrpSpPr>
-        <p:cNvPr id="1" name=""/>
-        <p:cNvGrpSpPr/>
-        <p:nvPr/>
-      </p:nvGrpSpPr>
-      <p:grpSpPr>
-        <a:xfrm>
-          <a:off x="0" y="0"/>
-          <a:ext cx="0" cy="0"/>
-          <a:chOff x="0" y="0"/>
-          <a:chExt cx="0" cy="0"/>
-        </a:xfrm>
-      </p:grpSpPr>
-      <p:sp>
-        <p:nvSpPr>
-          <p:cNvPr id="2" name="Textfeld 1"/>
-          <p:cNvSpPr txBox="1"/>
-          <p:nvPr/>
-        </p:nvSpPr>
-        <p:spPr>
-          <a:xfrm>
-            <a:off x="17721" y="319178"/>
-            <a:ext cx="9905999" cy="5709255"/>
-          </a:xfrm>
-          <a:prstGeom prst="rect">
-            <a:avLst/>
-          </a:prstGeom>
-          <a:noFill/>
-        </p:spPr>
-        <p:txBody>
-          <a:bodyPr wrap="square" rtlCol="0">
-            <a:spAutoFit/>
-          </a:bodyPr>
-          <a:lstStyle/>
-          <a:p>
-            <a:pPr algn="ctr"/>
-            <a:r>
-              <a:rPr lang="de-AT" sz="19900" b="1" dirty="0"/>
-              <a:t>ID</a:t>
-            </a:r>
-          </a:p>
-          <a:p>
-            <a:pPr algn="ctr"/>
-            <a:r>
-              <a:rPr lang="de-AT" sz="16600" b="1" dirty="0"/>
-              <a:t>160 - 179</a:t>
-            </a:r>
-            <a:endParaRPr lang="de-AT" sz="19900" b="1" dirty="0"/>
-          </a:p>
-        </p:txBody>
-      </p:sp>
-      <p:sp>
-        <p:nvSpPr>
-          <p:cNvPr id="3" name="Rechteck 2">
-            <a:extLst>
-              <a:ext uri="{FF2B5EF4-FFF2-40B4-BE49-F238E27FC236}">
-                <a16:creationId xmlns:a16="http://schemas.microsoft.com/office/drawing/2014/main" id="{8C74AAB0-481A-410D-B16C-BFB94CB9706D}"/>
-              </a:ext>
-            </a:extLst>
-          </p:cNvPr>
-          <p:cNvSpPr/>
-          <p:nvPr/>
-        </p:nvSpPr>
-        <p:spPr>
-          <a:xfrm>
-            <a:off x="265814" y="191386"/>
-            <a:ext cx="9409814" cy="6464595"/>
-          </a:xfrm>
-          <a:prstGeom prst="rect">
-            <a:avLst/>
-          </a:prstGeom>
-          <a:noFill/>
-          <a:ln w="127000">
-            <a:solidFill>
-              <a:srgbClr val="00B050"/>
-            </a:solidFill>
-          </a:ln>
-        </p:spPr>
-        <p:style>
-          <a:lnRef idx="2">
-            <a:schemeClr val="accent1">
-              <a:shade val="50000"/>
-            </a:schemeClr>
-          </a:lnRef>
-          <a:fillRef idx="1">
-            <a:schemeClr val="accent1"/>
-          </a:fillRef>
-          <a:effectRef idx="0">
-            <a:schemeClr val="accent1"/>
-          </a:effectRef>
-          <a:fontRef idx="minor">
-            <a:schemeClr val="lt1"/>
-          </a:fontRef>
-        </p:style>
-        <p:txBody>
-          <a:bodyPr rtlCol="0" anchor="ctr"/>
-          <a:lstStyle/>
-          <a:p>
-            <a:pPr algn="ctr"/>
-            <a:endParaRPr lang="de-AT"/>
-          </a:p>
-        </p:txBody>
-      </p:sp>
-    </p:spTree>
-    <p:extLst>
-      <p:ext uri="{BB962C8B-B14F-4D97-AF65-F5344CB8AC3E}">
-        <p14:creationId xmlns:p14="http://schemas.microsoft.com/office/powerpoint/2010/main" val="1330941501"/>
-      </p:ext>
-    </p:extLst>
-  </p:cSld>
-  <p:clrMapOvr>
-    <a:masterClrMapping/>
-  </p:clrMapOvr>
-</p:sld>
-</file>
-
-<file path=ppt/slides/slide14.xml><?xml version="1.0" encoding="utf-8"?>
-<p:sld xmlns:a="http://schemas.openxmlformats.org/drawingml/2006/main" xmlns:r="http://schemas.openxmlformats.org/officeDocument/2006/relationships" xmlns:p="http://schemas.openxmlformats.org/presentationml/2006/main">
-  <p:cSld>
-    <p:spTree>
-      <p:nvGrpSpPr>
-        <p:cNvPr id="1" name=""/>
-        <p:cNvGrpSpPr/>
-        <p:nvPr/>
-      </p:nvGrpSpPr>
-      <p:grpSpPr>
-        <a:xfrm>
-          <a:off x="0" y="0"/>
-          <a:ext cx="0" cy="0"/>
-          <a:chOff x="0" y="0"/>
-          <a:chExt cx="0" cy="0"/>
-        </a:xfrm>
-      </p:grpSpPr>
-      <p:sp>
-        <p:nvSpPr>
-          <p:cNvPr id="2" name="Textfeld 1"/>
-          <p:cNvSpPr txBox="1"/>
-          <p:nvPr/>
-        </p:nvSpPr>
-        <p:spPr>
-          <a:xfrm>
-            <a:off x="17721" y="379563"/>
-            <a:ext cx="9905999" cy="5709255"/>
-          </a:xfrm>
-          <a:prstGeom prst="rect">
-            <a:avLst/>
-          </a:prstGeom>
-          <a:noFill/>
-        </p:spPr>
-        <p:txBody>
-          <a:bodyPr wrap="square" rtlCol="0">
-            <a:spAutoFit/>
-          </a:bodyPr>
-          <a:lstStyle/>
-          <a:p>
-            <a:pPr algn="ctr"/>
-            <a:r>
-              <a:rPr lang="de-AT" sz="19900" b="1" dirty="0"/>
-              <a:t>ID</a:t>
-            </a:r>
-          </a:p>
-          <a:p>
-            <a:pPr algn="ctr"/>
-            <a:r>
-              <a:rPr lang="de-AT" sz="16600" b="1" dirty="0"/>
-              <a:t>180 - 199</a:t>
-            </a:r>
-            <a:endParaRPr lang="de-AT" sz="19900" b="1" dirty="0"/>
-          </a:p>
-        </p:txBody>
-      </p:sp>
-      <p:sp>
-        <p:nvSpPr>
-          <p:cNvPr id="3" name="Rechteck 2">
-            <a:extLst>
-              <a:ext uri="{FF2B5EF4-FFF2-40B4-BE49-F238E27FC236}">
-                <a16:creationId xmlns:a16="http://schemas.microsoft.com/office/drawing/2014/main" id="{8C74AAB0-481A-410D-B16C-BFB94CB9706D}"/>
-              </a:ext>
-            </a:extLst>
-          </p:cNvPr>
-          <p:cNvSpPr/>
-          <p:nvPr/>
-        </p:nvSpPr>
-        <p:spPr>
-          <a:xfrm>
-            <a:off x="265814" y="191386"/>
-            <a:ext cx="9409814" cy="6464595"/>
-          </a:xfrm>
-          <a:prstGeom prst="rect">
-            <a:avLst/>
-          </a:prstGeom>
-          <a:noFill/>
-          <a:ln w="127000">
-            <a:solidFill>
-              <a:srgbClr val="00B050"/>
-            </a:solidFill>
-          </a:ln>
-        </p:spPr>
-        <p:style>
-          <a:lnRef idx="2">
-            <a:schemeClr val="accent1">
-              <a:shade val="50000"/>
-            </a:schemeClr>
-          </a:lnRef>
-          <a:fillRef idx="1">
-            <a:schemeClr val="accent1"/>
-          </a:fillRef>
-          <a:effectRef idx="0">
-            <a:schemeClr val="accent1"/>
-          </a:effectRef>
-          <a:fontRef idx="minor">
-            <a:schemeClr val="lt1"/>
-          </a:fontRef>
-        </p:style>
-        <p:txBody>
-          <a:bodyPr rtlCol="0" anchor="ctr"/>
-          <a:lstStyle/>
-          <a:p>
-            <a:pPr algn="ctr"/>
-            <a:endParaRPr lang="de-AT"/>
-          </a:p>
-        </p:txBody>
-      </p:sp>
-    </p:spTree>
-    <p:extLst>
-      <p:ext uri="{BB962C8B-B14F-4D97-AF65-F5344CB8AC3E}">
-        <p14:creationId xmlns:p14="http://schemas.microsoft.com/office/powerpoint/2010/main" val="1391598766"/>
-      </p:ext>
-    </p:extLst>
-  </p:cSld>
-  <p:clrMapOvr>
-    <a:masterClrMapping/>
-  </p:clrMapOvr>
-</p:sld>
-</file>
-
-<file path=ppt/slides/slide15.xml><?xml version="1.0" encoding="utf-8"?>
-<p:sld xmlns:a="http://schemas.openxmlformats.org/drawingml/2006/main" xmlns:r="http://schemas.openxmlformats.org/officeDocument/2006/relationships" xmlns:p="http://schemas.openxmlformats.org/presentationml/2006/main">
-  <p:cSld>
-    <p:spTree>
-      <p:nvGrpSpPr>
-        <p:cNvPr id="1" name=""/>
-        <p:cNvGrpSpPr/>
-        <p:nvPr/>
-      </p:nvGrpSpPr>
-      <p:grpSpPr>
-        <a:xfrm>
-          <a:off x="0" y="0"/>
-          <a:ext cx="0" cy="0"/>
-          <a:chOff x="0" y="0"/>
-          <a:chExt cx="0" cy="0"/>
-        </a:xfrm>
-      </p:grpSpPr>
-      <p:sp>
-        <p:nvSpPr>
-          <p:cNvPr id="2" name="Textfeld 1"/>
-          <p:cNvSpPr txBox="1"/>
-          <p:nvPr/>
-        </p:nvSpPr>
-        <p:spPr>
-          <a:xfrm>
-            <a:off x="0" y="353683"/>
-            <a:ext cx="9905999" cy="5709255"/>
-          </a:xfrm>
-          <a:prstGeom prst="rect">
-            <a:avLst/>
-          </a:prstGeom>
-          <a:noFill/>
-        </p:spPr>
-        <p:txBody>
-          <a:bodyPr wrap="square" rtlCol="0">
-            <a:spAutoFit/>
-          </a:bodyPr>
-          <a:lstStyle/>
-          <a:p>
-            <a:pPr algn="ctr"/>
-            <a:r>
-              <a:rPr lang="de-AT" sz="19900" b="1" dirty="0"/>
-              <a:t>ID</a:t>
-            </a:r>
-          </a:p>
-          <a:p>
-            <a:pPr algn="ctr"/>
-            <a:r>
-              <a:rPr lang="de-AT" sz="16600" b="1" dirty="0"/>
-              <a:t>200 - 219</a:t>
-            </a:r>
-            <a:endParaRPr lang="de-AT" sz="19900" b="1" dirty="0"/>
-          </a:p>
-        </p:txBody>
-      </p:sp>
-      <p:sp>
-        <p:nvSpPr>
-          <p:cNvPr id="3" name="Rechteck 2">
-            <a:extLst>
-              <a:ext uri="{FF2B5EF4-FFF2-40B4-BE49-F238E27FC236}">
-                <a16:creationId xmlns:a16="http://schemas.microsoft.com/office/drawing/2014/main" id="{8C74AAB0-481A-410D-B16C-BFB94CB9706D}"/>
-              </a:ext>
-            </a:extLst>
-          </p:cNvPr>
-          <p:cNvSpPr/>
-          <p:nvPr/>
-        </p:nvSpPr>
-        <p:spPr>
-          <a:xfrm>
-            <a:off x="265814" y="191386"/>
-            <a:ext cx="9409814" cy="6464595"/>
-          </a:xfrm>
-          <a:prstGeom prst="rect">
-            <a:avLst/>
-          </a:prstGeom>
-          <a:noFill/>
-          <a:ln w="127000">
-            <a:solidFill>
-              <a:srgbClr val="00B050"/>
-            </a:solidFill>
-          </a:ln>
-        </p:spPr>
-        <p:style>
-          <a:lnRef idx="2">
-            <a:schemeClr val="accent1">
-              <a:shade val="50000"/>
-            </a:schemeClr>
-          </a:lnRef>
-          <a:fillRef idx="1">
-            <a:schemeClr val="accent1"/>
-          </a:fillRef>
-          <a:effectRef idx="0">
-            <a:schemeClr val="accent1"/>
-          </a:effectRef>
-          <a:fontRef idx="minor">
-            <a:schemeClr val="lt1"/>
-          </a:fontRef>
-        </p:style>
-        <p:txBody>
-          <a:bodyPr rtlCol="0" anchor="ctr"/>
-          <a:lstStyle/>
-          <a:p>
-            <a:pPr algn="ctr"/>
-            <a:endParaRPr lang="de-AT"/>
-          </a:p>
-        </p:txBody>
-      </p:sp>
-    </p:spTree>
-    <p:extLst>
-      <p:ext uri="{BB962C8B-B14F-4D97-AF65-F5344CB8AC3E}">
-        <p14:creationId xmlns:p14="http://schemas.microsoft.com/office/powerpoint/2010/main" val="1593130642"/>
-      </p:ext>
-    </p:extLst>
-  </p:cSld>
-  <p:clrMapOvr>
-    <a:masterClrMapping/>
-  </p:clrMapOvr>
-</p:sld>
-</file>
-
-<file path=ppt/slides/slide16.xml><?xml version="1.0" encoding="utf-8"?>
-<p:sld xmlns:a="http://schemas.openxmlformats.org/drawingml/2006/main" xmlns:r="http://schemas.openxmlformats.org/officeDocument/2006/relationships" xmlns:p="http://schemas.openxmlformats.org/presentationml/2006/main">
-  <p:cSld>
-    <p:spTree>
-      <p:nvGrpSpPr>
-        <p:cNvPr id="1" name=""/>
-        <p:cNvGrpSpPr/>
-        <p:nvPr/>
-      </p:nvGrpSpPr>
-      <p:grpSpPr>
-        <a:xfrm>
-          <a:off x="0" y="0"/>
-          <a:ext cx="0" cy="0"/>
-          <a:chOff x="0" y="0"/>
-          <a:chExt cx="0" cy="0"/>
-        </a:xfrm>
-      </p:grpSpPr>
-      <p:sp>
-        <p:nvSpPr>
-          <p:cNvPr id="2" name="Textfeld 1"/>
-          <p:cNvSpPr txBox="1"/>
-          <p:nvPr/>
-        </p:nvSpPr>
-        <p:spPr>
-          <a:xfrm>
-            <a:off x="0" y="362310"/>
-            <a:ext cx="9905999" cy="5709255"/>
-          </a:xfrm>
-          <a:prstGeom prst="rect">
-            <a:avLst/>
-          </a:prstGeom>
-          <a:noFill/>
-        </p:spPr>
-        <p:txBody>
-          <a:bodyPr wrap="square" rtlCol="0">
-            <a:spAutoFit/>
-          </a:bodyPr>
-          <a:lstStyle/>
-          <a:p>
-            <a:pPr algn="ctr"/>
-            <a:r>
-              <a:rPr lang="de-AT" sz="19900" b="1" dirty="0"/>
-              <a:t>ID</a:t>
-            </a:r>
-          </a:p>
-          <a:p>
-            <a:pPr algn="ctr"/>
-            <a:r>
-              <a:rPr lang="de-AT" sz="16600" b="1" dirty="0"/>
-              <a:t>220 - 239</a:t>
-            </a:r>
-            <a:endParaRPr lang="de-AT" sz="19900" b="1" dirty="0"/>
-          </a:p>
-        </p:txBody>
-      </p:sp>
-      <p:sp>
-        <p:nvSpPr>
-          <p:cNvPr id="3" name="Rechteck 2">
-            <a:extLst>
-              <a:ext uri="{FF2B5EF4-FFF2-40B4-BE49-F238E27FC236}">
-                <a16:creationId xmlns:a16="http://schemas.microsoft.com/office/drawing/2014/main" id="{8C74AAB0-481A-410D-B16C-BFB94CB9706D}"/>
-              </a:ext>
-            </a:extLst>
-          </p:cNvPr>
-          <p:cNvSpPr/>
-          <p:nvPr/>
-        </p:nvSpPr>
-        <p:spPr>
-          <a:xfrm>
-            <a:off x="265814" y="191386"/>
-            <a:ext cx="9409814" cy="6464595"/>
-          </a:xfrm>
-          <a:prstGeom prst="rect">
-            <a:avLst/>
-          </a:prstGeom>
-          <a:noFill/>
-          <a:ln w="127000">
-            <a:solidFill>
-              <a:srgbClr val="00B050"/>
-            </a:solidFill>
-          </a:ln>
-        </p:spPr>
-        <p:style>
-          <a:lnRef idx="2">
-            <a:schemeClr val="accent1">
-              <a:shade val="50000"/>
-            </a:schemeClr>
-          </a:lnRef>
-          <a:fillRef idx="1">
-            <a:schemeClr val="accent1"/>
-          </a:fillRef>
-          <a:effectRef idx="0">
-            <a:schemeClr val="accent1"/>
-          </a:effectRef>
-          <a:fontRef idx="minor">
-            <a:schemeClr val="lt1"/>
-          </a:fontRef>
-        </p:style>
-        <p:txBody>
-          <a:bodyPr rtlCol="0" anchor="ctr"/>
-          <a:lstStyle/>
-          <a:p>
-            <a:pPr algn="ctr"/>
-            <a:endParaRPr lang="de-AT"/>
-          </a:p>
-        </p:txBody>
-      </p:sp>
-    </p:spTree>
-    <p:extLst>
-      <p:ext uri="{BB962C8B-B14F-4D97-AF65-F5344CB8AC3E}">
-        <p14:creationId xmlns:p14="http://schemas.microsoft.com/office/powerpoint/2010/main" val="3067196611"/>
-      </p:ext>
-    </p:extLst>
-  </p:cSld>
-  <p:clrMapOvr>
-    <a:masterClrMapping/>
-  </p:clrMapOvr>
-</p:sld>
-</file>
-
-<file path=ppt/slides/slide17.xml><?xml version="1.0" encoding="utf-8"?>
-<p:sld xmlns:a="http://schemas.openxmlformats.org/drawingml/2006/main" xmlns:r="http://schemas.openxmlformats.org/officeDocument/2006/relationships" xmlns:p="http://schemas.openxmlformats.org/presentationml/2006/main">
-  <p:cSld>
-    <p:spTree>
-      <p:nvGrpSpPr>
-        <p:cNvPr id="1" name=""/>
-        <p:cNvGrpSpPr/>
-        <p:nvPr/>
-      </p:nvGrpSpPr>
-      <p:grpSpPr>
-        <a:xfrm>
-          <a:off x="0" y="0"/>
-          <a:ext cx="0" cy="0"/>
-          <a:chOff x="0" y="0"/>
-          <a:chExt cx="0" cy="0"/>
-        </a:xfrm>
-      </p:grpSpPr>
-      <p:sp>
-        <p:nvSpPr>
-          <p:cNvPr id="3" name="Rechteck 2">
-            <a:extLst>
-              <a:ext uri="{FF2B5EF4-FFF2-40B4-BE49-F238E27FC236}">
-                <a16:creationId xmlns:a16="http://schemas.microsoft.com/office/drawing/2014/main" id="{8C74AAB0-481A-410D-B16C-BFB94CB9706D}"/>
-              </a:ext>
-            </a:extLst>
-          </p:cNvPr>
-          <p:cNvSpPr/>
-          <p:nvPr/>
-        </p:nvSpPr>
-        <p:spPr>
-          <a:xfrm>
-            <a:off x="265814" y="191386"/>
-            <a:ext cx="9409814" cy="6464595"/>
-          </a:xfrm>
-          <a:prstGeom prst="rect">
-            <a:avLst/>
-          </a:prstGeom>
-          <a:noFill/>
-          <a:ln w="127000">
-            <a:solidFill>
-              <a:srgbClr val="00B050"/>
-            </a:solidFill>
-          </a:ln>
-        </p:spPr>
-        <p:style>
-          <a:lnRef idx="2">
-            <a:schemeClr val="accent1">
-              <a:shade val="50000"/>
-            </a:schemeClr>
-          </a:lnRef>
-          <a:fillRef idx="1">
-            <a:schemeClr val="accent1"/>
-          </a:fillRef>
-          <a:effectRef idx="0">
-            <a:schemeClr val="accent1"/>
-          </a:effectRef>
-          <a:fontRef idx="minor">
-            <a:schemeClr val="lt1"/>
-          </a:fontRef>
-        </p:style>
-        <p:txBody>
-          <a:bodyPr rtlCol="0" anchor="ctr"/>
-          <a:lstStyle/>
-          <a:p>
-            <a:pPr algn="ctr"/>
-            <a:endParaRPr lang="de-AT"/>
-          </a:p>
-        </p:txBody>
-      </p:sp>
-      <p:sp>
-        <p:nvSpPr>
-          <p:cNvPr id="4" name="Textfeld 3">
-            <a:extLst>
-              <a:ext uri="{FF2B5EF4-FFF2-40B4-BE49-F238E27FC236}">
-                <a16:creationId xmlns:a16="http://schemas.microsoft.com/office/drawing/2014/main" id="{DBDB1E4C-ABEE-4687-A2D6-6188FBCCE681}"/>
-              </a:ext>
-            </a:extLst>
-          </p:cNvPr>
-          <p:cNvSpPr txBox="1"/>
-          <p:nvPr/>
-        </p:nvSpPr>
-        <p:spPr>
-          <a:xfrm>
-            <a:off x="0" y="362310"/>
-            <a:ext cx="9905999" cy="5709255"/>
-          </a:xfrm>
-          <a:prstGeom prst="rect">
-            <a:avLst/>
-          </a:prstGeom>
-          <a:noFill/>
-        </p:spPr>
-        <p:txBody>
-          <a:bodyPr wrap="square" rtlCol="0">
-            <a:spAutoFit/>
-          </a:bodyPr>
-          <a:lstStyle/>
-          <a:p>
-            <a:pPr algn="ctr"/>
-            <a:r>
-              <a:rPr lang="de-AT" sz="19900" b="1" dirty="0"/>
-              <a:t>ID</a:t>
-            </a:r>
-          </a:p>
-          <a:p>
-            <a:pPr algn="ctr"/>
-            <a:r>
-              <a:rPr lang="de-AT" sz="16600" b="1" dirty="0"/>
-              <a:t>240 - 259</a:t>
-            </a:r>
-            <a:endParaRPr lang="de-AT" sz="19900" b="1" dirty="0"/>
-          </a:p>
-        </p:txBody>
-      </p:sp>
-    </p:spTree>
-    <p:extLst>
-      <p:ext uri="{BB962C8B-B14F-4D97-AF65-F5344CB8AC3E}">
-        <p14:creationId xmlns:p14="http://schemas.microsoft.com/office/powerpoint/2010/main" val="2954733940"/>
-      </p:ext>
-    </p:extLst>
-  </p:cSld>
-  <p:clrMapOvr>
-    <a:masterClrMapping/>
-  </p:clrMapOvr>
-</p:sld>
-</file>
-
-<file path=ppt/slides/slide18.xml><?xml version="1.0" encoding="utf-8"?>
-<p:sld xmlns:a="http://schemas.openxmlformats.org/drawingml/2006/main" xmlns:r="http://schemas.openxmlformats.org/officeDocument/2006/relationships" xmlns:p="http://schemas.openxmlformats.org/presentationml/2006/main">
-  <p:cSld>
-    <p:spTree>
-      <p:nvGrpSpPr>
-        <p:cNvPr id="1" name=""/>
-        <p:cNvGrpSpPr/>
-        <p:nvPr/>
-      </p:nvGrpSpPr>
-      <p:grpSpPr>
-        <a:xfrm>
-          <a:off x="0" y="0"/>
-          <a:ext cx="0" cy="0"/>
-          <a:chOff x="0" y="0"/>
-          <a:chExt cx="0" cy="0"/>
-        </a:xfrm>
-      </p:grpSpPr>
-      <p:sp>
-        <p:nvSpPr>
-          <p:cNvPr id="3" name="Rechteck 2">
-            <a:extLst>
-              <a:ext uri="{FF2B5EF4-FFF2-40B4-BE49-F238E27FC236}">
-                <a16:creationId xmlns:a16="http://schemas.microsoft.com/office/drawing/2014/main" id="{8C74AAB0-481A-410D-B16C-BFB94CB9706D}"/>
-              </a:ext>
-            </a:extLst>
-          </p:cNvPr>
-          <p:cNvSpPr/>
-          <p:nvPr/>
-        </p:nvSpPr>
-        <p:spPr>
-          <a:xfrm>
-            <a:off x="265814" y="191386"/>
-            <a:ext cx="9409814" cy="6464595"/>
-          </a:xfrm>
-          <a:prstGeom prst="rect">
-            <a:avLst/>
-          </a:prstGeom>
-          <a:noFill/>
-          <a:ln w="127000">
-            <a:solidFill>
-              <a:srgbClr val="00B050"/>
-            </a:solidFill>
-          </a:ln>
-        </p:spPr>
-        <p:style>
-          <a:lnRef idx="2">
-            <a:schemeClr val="accent1">
-              <a:shade val="50000"/>
-            </a:schemeClr>
-          </a:lnRef>
-          <a:fillRef idx="1">
-            <a:schemeClr val="accent1"/>
-          </a:fillRef>
-          <a:effectRef idx="0">
-            <a:schemeClr val="accent1"/>
-          </a:effectRef>
-          <a:fontRef idx="minor">
-            <a:schemeClr val="lt1"/>
-          </a:fontRef>
-        </p:style>
-        <p:txBody>
-          <a:bodyPr rtlCol="0" anchor="ctr"/>
-          <a:lstStyle/>
-          <a:p>
-            <a:pPr algn="ctr"/>
-            <a:endParaRPr lang="de-AT"/>
-          </a:p>
-        </p:txBody>
-      </p:sp>
-      <p:sp>
-        <p:nvSpPr>
-          <p:cNvPr id="4" name="Textfeld 3">
-            <a:extLst>
-              <a:ext uri="{FF2B5EF4-FFF2-40B4-BE49-F238E27FC236}">
-                <a16:creationId xmlns:a16="http://schemas.microsoft.com/office/drawing/2014/main" id="{DBDB1E4C-ABEE-4687-A2D6-6188FBCCE681}"/>
-              </a:ext>
-            </a:extLst>
-          </p:cNvPr>
-          <p:cNvSpPr txBox="1"/>
-          <p:nvPr/>
-        </p:nvSpPr>
-        <p:spPr>
-          <a:xfrm>
-            <a:off x="0" y="362310"/>
-            <a:ext cx="9905999" cy="5709255"/>
-          </a:xfrm>
-          <a:prstGeom prst="rect">
-            <a:avLst/>
-          </a:prstGeom>
-          <a:noFill/>
-        </p:spPr>
-        <p:txBody>
-          <a:bodyPr wrap="square" rtlCol="0">
-            <a:spAutoFit/>
-          </a:bodyPr>
-          <a:lstStyle/>
-          <a:p>
-            <a:pPr algn="ctr"/>
-            <a:r>
-              <a:rPr lang="de-AT" sz="19900" b="1" dirty="0"/>
-              <a:t>ID</a:t>
-            </a:r>
-          </a:p>
-          <a:p>
-            <a:pPr algn="ctr"/>
-            <a:r>
-              <a:rPr lang="de-AT" sz="16600" b="1" dirty="0"/>
-              <a:t>260 - 279</a:t>
-            </a:r>
-            <a:endParaRPr lang="de-AT" sz="19900" b="1" dirty="0"/>
-          </a:p>
-        </p:txBody>
-      </p:sp>
-    </p:spTree>
-    <p:extLst>
-      <p:ext uri="{BB962C8B-B14F-4D97-AF65-F5344CB8AC3E}">
-        <p14:creationId xmlns:p14="http://schemas.microsoft.com/office/powerpoint/2010/main" val="3793170899"/>
-      </p:ext>
-    </p:extLst>
-  </p:cSld>
-  <p:clrMapOvr>
-    <a:masterClrMapping/>
-  </p:clrMapOvr>
-</p:sld>
-</file>
-
-<file path=ppt/slides/slide19.xml><?xml version="1.0" encoding="utf-8"?>
-<p:sld xmlns:a="http://schemas.openxmlformats.org/drawingml/2006/main" xmlns:r="http://schemas.openxmlformats.org/officeDocument/2006/relationships" xmlns:p="http://schemas.openxmlformats.org/presentationml/2006/main">
-  <p:cSld>
-    <p:spTree>
-      <p:nvGrpSpPr>
-        <p:cNvPr id="1" name=""/>
-        <p:cNvGrpSpPr/>
-        <p:nvPr/>
-      </p:nvGrpSpPr>
-      <p:grpSpPr>
-        <a:xfrm>
-          <a:off x="0" y="0"/>
-          <a:ext cx="0" cy="0"/>
-          <a:chOff x="0" y="0"/>
-          <a:chExt cx="0" cy="0"/>
-        </a:xfrm>
-      </p:grpSpPr>
-      <p:sp>
-        <p:nvSpPr>
-          <p:cNvPr id="3" name="Rechteck 2">
-            <a:extLst>
-              <a:ext uri="{FF2B5EF4-FFF2-40B4-BE49-F238E27FC236}">
-                <a16:creationId xmlns:a16="http://schemas.microsoft.com/office/drawing/2014/main" id="{8C74AAB0-481A-410D-B16C-BFB94CB9706D}"/>
-              </a:ext>
-            </a:extLst>
-          </p:cNvPr>
-          <p:cNvSpPr/>
-          <p:nvPr/>
-        </p:nvSpPr>
-        <p:spPr>
-          <a:xfrm>
-            <a:off x="265814" y="191386"/>
-            <a:ext cx="9409814" cy="6464595"/>
-          </a:xfrm>
-          <a:prstGeom prst="rect">
-            <a:avLst/>
-          </a:prstGeom>
-          <a:noFill/>
-          <a:ln w="127000">
-            <a:solidFill>
-              <a:srgbClr val="00B050"/>
-            </a:solidFill>
-          </a:ln>
-        </p:spPr>
-        <p:style>
-          <a:lnRef idx="2">
-            <a:schemeClr val="accent1">
-              <a:shade val="50000"/>
-            </a:schemeClr>
-          </a:lnRef>
-          <a:fillRef idx="1">
-            <a:schemeClr val="accent1"/>
-          </a:fillRef>
-          <a:effectRef idx="0">
-            <a:schemeClr val="accent1"/>
-          </a:effectRef>
-          <a:fontRef idx="minor">
-            <a:schemeClr val="lt1"/>
-          </a:fontRef>
-        </p:style>
-        <p:txBody>
-          <a:bodyPr rtlCol="0" anchor="ctr"/>
-          <a:lstStyle/>
-          <a:p>
-            <a:pPr algn="ctr"/>
-            <a:endParaRPr lang="de-AT"/>
-          </a:p>
-        </p:txBody>
-      </p:sp>
-      <p:sp>
-        <p:nvSpPr>
-          <p:cNvPr id="4" name="Textfeld 3">
-            <a:extLst>
-              <a:ext uri="{FF2B5EF4-FFF2-40B4-BE49-F238E27FC236}">
-                <a16:creationId xmlns:a16="http://schemas.microsoft.com/office/drawing/2014/main" id="{DBDB1E4C-ABEE-4687-A2D6-6188FBCCE681}"/>
-              </a:ext>
-            </a:extLst>
-          </p:cNvPr>
-          <p:cNvSpPr txBox="1"/>
-          <p:nvPr/>
-        </p:nvSpPr>
-        <p:spPr>
-          <a:xfrm>
-            <a:off x="0" y="362310"/>
-            <a:ext cx="9905999" cy="5709255"/>
-          </a:xfrm>
-          <a:prstGeom prst="rect">
-            <a:avLst/>
-          </a:prstGeom>
-          <a:noFill/>
-        </p:spPr>
-        <p:txBody>
-          <a:bodyPr wrap="square" rtlCol="0">
-            <a:spAutoFit/>
-          </a:bodyPr>
-          <a:lstStyle/>
-          <a:p>
-            <a:pPr algn="ctr"/>
-            <a:r>
-              <a:rPr lang="de-AT" sz="19900" b="1" dirty="0"/>
-              <a:t>ID</a:t>
-            </a:r>
-          </a:p>
-          <a:p>
-            <a:pPr algn="ctr"/>
-            <a:r>
-              <a:rPr lang="de-AT" sz="16600" b="1" dirty="0"/>
-              <a:t>280 - 299</a:t>
-            </a:r>
-            <a:endParaRPr lang="de-AT" sz="19900" b="1" dirty="0"/>
-          </a:p>
-        </p:txBody>
-      </p:sp>
-    </p:spTree>
-    <p:extLst>
-      <p:ext uri="{BB962C8B-B14F-4D97-AF65-F5344CB8AC3E}">
-        <p14:creationId xmlns:p14="http://schemas.microsoft.com/office/powerpoint/2010/main" val="1176448126"/>
-      </p:ext>
-    </p:extLst>
-  </p:cSld>
-  <p:clrMapOvr>
-    <a:masterClrMapping/>
-  </p:clrMapOvr>
-</p:sld>
-</file>
-
 <file path=ppt/slides/slide2.xml><?xml version="1.0" encoding="utf-8"?>
 <p:sld xmlns:a="http://schemas.openxmlformats.org/drawingml/2006/main" xmlns:r="http://schemas.openxmlformats.org/officeDocument/2006/relationships" xmlns:p="http://schemas.openxmlformats.org/presentationml/2006/main">
   <p:cSld>
@@ -4927,1266 +3683,6 @@
     <p:extLst>
       <p:ext uri="{BB962C8B-B14F-4D97-AF65-F5344CB8AC3E}">
         <p14:creationId xmlns:p14="http://schemas.microsoft.com/office/powerpoint/2010/main" val="3513991903"/>
-      </p:ext>
-    </p:extLst>
-  </p:cSld>
-  <p:clrMapOvr>
-    <a:masterClrMapping/>
-  </p:clrMapOvr>
-</p:sld>
-</file>
-
-<file path=ppt/slides/slide20.xml><?xml version="1.0" encoding="utf-8"?>
-<p:sld xmlns:a="http://schemas.openxmlformats.org/drawingml/2006/main" xmlns:r="http://schemas.openxmlformats.org/officeDocument/2006/relationships" xmlns:p="http://schemas.openxmlformats.org/presentationml/2006/main">
-  <p:cSld>
-    <p:spTree>
-      <p:nvGrpSpPr>
-        <p:cNvPr id="1" name=""/>
-        <p:cNvGrpSpPr/>
-        <p:nvPr/>
-      </p:nvGrpSpPr>
-      <p:grpSpPr>
-        <a:xfrm>
-          <a:off x="0" y="0"/>
-          <a:ext cx="0" cy="0"/>
-          <a:chOff x="0" y="0"/>
-          <a:chExt cx="0" cy="0"/>
-        </a:xfrm>
-      </p:grpSpPr>
-      <p:sp>
-        <p:nvSpPr>
-          <p:cNvPr id="3" name="Rechteck 2">
-            <a:extLst>
-              <a:ext uri="{FF2B5EF4-FFF2-40B4-BE49-F238E27FC236}">
-                <a16:creationId xmlns:a16="http://schemas.microsoft.com/office/drawing/2014/main" id="{8C74AAB0-481A-410D-B16C-BFB94CB9706D}"/>
-              </a:ext>
-            </a:extLst>
-          </p:cNvPr>
-          <p:cNvSpPr/>
-          <p:nvPr/>
-        </p:nvSpPr>
-        <p:spPr>
-          <a:xfrm>
-            <a:off x="265814" y="191386"/>
-            <a:ext cx="9409814" cy="6464595"/>
-          </a:xfrm>
-          <a:prstGeom prst="rect">
-            <a:avLst/>
-          </a:prstGeom>
-          <a:noFill/>
-          <a:ln w="127000">
-            <a:solidFill>
-              <a:srgbClr val="00B050"/>
-            </a:solidFill>
-          </a:ln>
-        </p:spPr>
-        <p:style>
-          <a:lnRef idx="2">
-            <a:schemeClr val="accent1">
-              <a:shade val="50000"/>
-            </a:schemeClr>
-          </a:lnRef>
-          <a:fillRef idx="1">
-            <a:schemeClr val="accent1"/>
-          </a:fillRef>
-          <a:effectRef idx="0">
-            <a:schemeClr val="accent1"/>
-          </a:effectRef>
-          <a:fontRef idx="minor">
-            <a:schemeClr val="lt1"/>
-          </a:fontRef>
-        </p:style>
-        <p:txBody>
-          <a:bodyPr rtlCol="0" anchor="ctr"/>
-          <a:lstStyle/>
-          <a:p>
-            <a:pPr algn="ctr"/>
-            <a:endParaRPr lang="de-AT"/>
-          </a:p>
-        </p:txBody>
-      </p:sp>
-      <p:sp>
-        <p:nvSpPr>
-          <p:cNvPr id="4" name="Textfeld 3">
-            <a:extLst>
-              <a:ext uri="{FF2B5EF4-FFF2-40B4-BE49-F238E27FC236}">
-                <a16:creationId xmlns:a16="http://schemas.microsoft.com/office/drawing/2014/main" id="{DBDB1E4C-ABEE-4687-A2D6-6188FBCCE681}"/>
-              </a:ext>
-            </a:extLst>
-          </p:cNvPr>
-          <p:cNvSpPr txBox="1"/>
-          <p:nvPr/>
-        </p:nvSpPr>
-        <p:spPr>
-          <a:xfrm>
-            <a:off x="0" y="362310"/>
-            <a:ext cx="9905999" cy="5709255"/>
-          </a:xfrm>
-          <a:prstGeom prst="rect">
-            <a:avLst/>
-          </a:prstGeom>
-          <a:noFill/>
-        </p:spPr>
-        <p:txBody>
-          <a:bodyPr wrap="square" rtlCol="0">
-            <a:spAutoFit/>
-          </a:bodyPr>
-          <a:lstStyle/>
-          <a:p>
-            <a:pPr algn="ctr"/>
-            <a:r>
-              <a:rPr lang="de-AT" sz="19900" b="1" dirty="0"/>
-              <a:t>ID</a:t>
-            </a:r>
-          </a:p>
-          <a:p>
-            <a:pPr algn="ctr"/>
-            <a:r>
-              <a:rPr lang="de-AT" sz="16600" b="1" dirty="0"/>
-              <a:t>300 - 319</a:t>
-            </a:r>
-            <a:endParaRPr lang="de-AT" sz="19900" b="1" dirty="0"/>
-          </a:p>
-        </p:txBody>
-      </p:sp>
-    </p:spTree>
-    <p:extLst>
-      <p:ext uri="{BB962C8B-B14F-4D97-AF65-F5344CB8AC3E}">
-        <p14:creationId xmlns:p14="http://schemas.microsoft.com/office/powerpoint/2010/main" val="1756249968"/>
-      </p:ext>
-    </p:extLst>
-  </p:cSld>
-  <p:clrMapOvr>
-    <a:masterClrMapping/>
-  </p:clrMapOvr>
-</p:sld>
-</file>
-
-<file path=ppt/slides/slide21.xml><?xml version="1.0" encoding="utf-8"?>
-<p:sld xmlns:a="http://schemas.openxmlformats.org/drawingml/2006/main" xmlns:r="http://schemas.openxmlformats.org/officeDocument/2006/relationships" xmlns:p="http://schemas.openxmlformats.org/presentationml/2006/main">
-  <p:cSld>
-    <p:spTree>
-      <p:nvGrpSpPr>
-        <p:cNvPr id="1" name=""/>
-        <p:cNvGrpSpPr/>
-        <p:nvPr/>
-      </p:nvGrpSpPr>
-      <p:grpSpPr>
-        <a:xfrm>
-          <a:off x="0" y="0"/>
-          <a:ext cx="0" cy="0"/>
-          <a:chOff x="0" y="0"/>
-          <a:chExt cx="0" cy="0"/>
-        </a:xfrm>
-      </p:grpSpPr>
-      <p:sp>
-        <p:nvSpPr>
-          <p:cNvPr id="3" name="Rechteck 2">
-            <a:extLst>
-              <a:ext uri="{FF2B5EF4-FFF2-40B4-BE49-F238E27FC236}">
-                <a16:creationId xmlns:a16="http://schemas.microsoft.com/office/drawing/2014/main" id="{8C74AAB0-481A-410D-B16C-BFB94CB9706D}"/>
-              </a:ext>
-            </a:extLst>
-          </p:cNvPr>
-          <p:cNvSpPr/>
-          <p:nvPr/>
-        </p:nvSpPr>
-        <p:spPr>
-          <a:xfrm>
-            <a:off x="265814" y="191386"/>
-            <a:ext cx="9409814" cy="6464595"/>
-          </a:xfrm>
-          <a:prstGeom prst="rect">
-            <a:avLst/>
-          </a:prstGeom>
-          <a:noFill/>
-          <a:ln w="127000">
-            <a:solidFill>
-              <a:srgbClr val="00B050"/>
-            </a:solidFill>
-          </a:ln>
-        </p:spPr>
-        <p:style>
-          <a:lnRef idx="2">
-            <a:schemeClr val="accent1">
-              <a:shade val="50000"/>
-            </a:schemeClr>
-          </a:lnRef>
-          <a:fillRef idx="1">
-            <a:schemeClr val="accent1"/>
-          </a:fillRef>
-          <a:effectRef idx="0">
-            <a:schemeClr val="accent1"/>
-          </a:effectRef>
-          <a:fontRef idx="minor">
-            <a:schemeClr val="lt1"/>
-          </a:fontRef>
-        </p:style>
-        <p:txBody>
-          <a:bodyPr rtlCol="0" anchor="ctr"/>
-          <a:lstStyle/>
-          <a:p>
-            <a:pPr algn="ctr"/>
-            <a:endParaRPr lang="de-AT"/>
-          </a:p>
-        </p:txBody>
-      </p:sp>
-      <p:sp>
-        <p:nvSpPr>
-          <p:cNvPr id="4" name="Textfeld 3">
-            <a:extLst>
-              <a:ext uri="{FF2B5EF4-FFF2-40B4-BE49-F238E27FC236}">
-                <a16:creationId xmlns:a16="http://schemas.microsoft.com/office/drawing/2014/main" id="{DBDB1E4C-ABEE-4687-A2D6-6188FBCCE681}"/>
-              </a:ext>
-            </a:extLst>
-          </p:cNvPr>
-          <p:cNvSpPr txBox="1"/>
-          <p:nvPr/>
-        </p:nvSpPr>
-        <p:spPr>
-          <a:xfrm>
-            <a:off x="0" y="362310"/>
-            <a:ext cx="9905999" cy="5709255"/>
-          </a:xfrm>
-          <a:prstGeom prst="rect">
-            <a:avLst/>
-          </a:prstGeom>
-          <a:noFill/>
-        </p:spPr>
-        <p:txBody>
-          <a:bodyPr wrap="square" rtlCol="0">
-            <a:spAutoFit/>
-          </a:bodyPr>
-          <a:lstStyle/>
-          <a:p>
-            <a:pPr algn="ctr"/>
-            <a:r>
-              <a:rPr lang="de-AT" sz="19900" b="1" dirty="0"/>
-              <a:t>ID</a:t>
-            </a:r>
-          </a:p>
-          <a:p>
-            <a:pPr algn="ctr"/>
-            <a:r>
-              <a:rPr lang="de-AT" sz="16600" b="1" dirty="0"/>
-              <a:t>320 - 339</a:t>
-            </a:r>
-            <a:endParaRPr lang="de-AT" sz="19900" b="1" dirty="0"/>
-          </a:p>
-        </p:txBody>
-      </p:sp>
-    </p:spTree>
-    <p:extLst>
-      <p:ext uri="{BB962C8B-B14F-4D97-AF65-F5344CB8AC3E}">
-        <p14:creationId xmlns:p14="http://schemas.microsoft.com/office/powerpoint/2010/main" val="3072594954"/>
-      </p:ext>
-    </p:extLst>
-  </p:cSld>
-  <p:clrMapOvr>
-    <a:masterClrMapping/>
-  </p:clrMapOvr>
-</p:sld>
-</file>
-
-<file path=ppt/slides/slide22.xml><?xml version="1.0" encoding="utf-8"?>
-<p:sld xmlns:a="http://schemas.openxmlformats.org/drawingml/2006/main" xmlns:r="http://schemas.openxmlformats.org/officeDocument/2006/relationships" xmlns:p="http://schemas.openxmlformats.org/presentationml/2006/main">
-  <p:cSld>
-    <p:spTree>
-      <p:nvGrpSpPr>
-        <p:cNvPr id="1" name=""/>
-        <p:cNvGrpSpPr/>
-        <p:nvPr/>
-      </p:nvGrpSpPr>
-      <p:grpSpPr>
-        <a:xfrm>
-          <a:off x="0" y="0"/>
-          <a:ext cx="0" cy="0"/>
-          <a:chOff x="0" y="0"/>
-          <a:chExt cx="0" cy="0"/>
-        </a:xfrm>
-      </p:grpSpPr>
-      <p:sp>
-        <p:nvSpPr>
-          <p:cNvPr id="3" name="Rechteck 2">
-            <a:extLst>
-              <a:ext uri="{FF2B5EF4-FFF2-40B4-BE49-F238E27FC236}">
-                <a16:creationId xmlns:a16="http://schemas.microsoft.com/office/drawing/2014/main" id="{8C74AAB0-481A-410D-B16C-BFB94CB9706D}"/>
-              </a:ext>
-            </a:extLst>
-          </p:cNvPr>
-          <p:cNvSpPr/>
-          <p:nvPr/>
-        </p:nvSpPr>
-        <p:spPr>
-          <a:xfrm>
-            <a:off x="265814" y="191386"/>
-            <a:ext cx="9409814" cy="6464595"/>
-          </a:xfrm>
-          <a:prstGeom prst="rect">
-            <a:avLst/>
-          </a:prstGeom>
-          <a:noFill/>
-          <a:ln w="127000">
-            <a:solidFill>
-              <a:srgbClr val="00B050"/>
-            </a:solidFill>
-          </a:ln>
-        </p:spPr>
-        <p:style>
-          <a:lnRef idx="2">
-            <a:schemeClr val="accent1">
-              <a:shade val="50000"/>
-            </a:schemeClr>
-          </a:lnRef>
-          <a:fillRef idx="1">
-            <a:schemeClr val="accent1"/>
-          </a:fillRef>
-          <a:effectRef idx="0">
-            <a:schemeClr val="accent1"/>
-          </a:effectRef>
-          <a:fontRef idx="minor">
-            <a:schemeClr val="lt1"/>
-          </a:fontRef>
-        </p:style>
-        <p:txBody>
-          <a:bodyPr rtlCol="0" anchor="ctr"/>
-          <a:lstStyle/>
-          <a:p>
-            <a:pPr algn="ctr"/>
-            <a:endParaRPr lang="de-AT"/>
-          </a:p>
-        </p:txBody>
-      </p:sp>
-      <p:sp>
-        <p:nvSpPr>
-          <p:cNvPr id="4" name="Textfeld 3">
-            <a:extLst>
-              <a:ext uri="{FF2B5EF4-FFF2-40B4-BE49-F238E27FC236}">
-                <a16:creationId xmlns:a16="http://schemas.microsoft.com/office/drawing/2014/main" id="{DBDB1E4C-ABEE-4687-A2D6-6188FBCCE681}"/>
-              </a:ext>
-            </a:extLst>
-          </p:cNvPr>
-          <p:cNvSpPr txBox="1"/>
-          <p:nvPr/>
-        </p:nvSpPr>
-        <p:spPr>
-          <a:xfrm>
-            <a:off x="0" y="362310"/>
-            <a:ext cx="9905999" cy="5709255"/>
-          </a:xfrm>
-          <a:prstGeom prst="rect">
-            <a:avLst/>
-          </a:prstGeom>
-          <a:noFill/>
-        </p:spPr>
-        <p:txBody>
-          <a:bodyPr wrap="square" rtlCol="0">
-            <a:spAutoFit/>
-          </a:bodyPr>
-          <a:lstStyle/>
-          <a:p>
-            <a:pPr algn="ctr"/>
-            <a:r>
-              <a:rPr lang="de-AT" sz="19900" b="1" dirty="0"/>
-              <a:t>ID</a:t>
-            </a:r>
-          </a:p>
-          <a:p>
-            <a:pPr algn="ctr"/>
-            <a:r>
-              <a:rPr lang="de-AT" sz="16600" b="1" dirty="0"/>
-              <a:t>340 - 359</a:t>
-            </a:r>
-            <a:endParaRPr lang="de-AT" sz="19900" b="1" dirty="0"/>
-          </a:p>
-        </p:txBody>
-      </p:sp>
-    </p:spTree>
-    <p:extLst>
-      <p:ext uri="{BB962C8B-B14F-4D97-AF65-F5344CB8AC3E}">
-        <p14:creationId xmlns:p14="http://schemas.microsoft.com/office/powerpoint/2010/main" val="678309431"/>
-      </p:ext>
-    </p:extLst>
-  </p:cSld>
-  <p:clrMapOvr>
-    <a:masterClrMapping/>
-  </p:clrMapOvr>
-</p:sld>
-</file>
-
-<file path=ppt/slides/slide23.xml><?xml version="1.0" encoding="utf-8"?>
-<p:sld xmlns:a="http://schemas.openxmlformats.org/drawingml/2006/main" xmlns:r="http://schemas.openxmlformats.org/officeDocument/2006/relationships" xmlns:p="http://schemas.openxmlformats.org/presentationml/2006/main">
-  <p:cSld>
-    <p:spTree>
-      <p:nvGrpSpPr>
-        <p:cNvPr id="1" name=""/>
-        <p:cNvGrpSpPr/>
-        <p:nvPr/>
-      </p:nvGrpSpPr>
-      <p:grpSpPr>
-        <a:xfrm>
-          <a:off x="0" y="0"/>
-          <a:ext cx="0" cy="0"/>
-          <a:chOff x="0" y="0"/>
-          <a:chExt cx="0" cy="0"/>
-        </a:xfrm>
-      </p:grpSpPr>
-      <p:sp>
-        <p:nvSpPr>
-          <p:cNvPr id="3" name="Rechteck 2">
-            <a:extLst>
-              <a:ext uri="{FF2B5EF4-FFF2-40B4-BE49-F238E27FC236}">
-                <a16:creationId xmlns:a16="http://schemas.microsoft.com/office/drawing/2014/main" id="{8C74AAB0-481A-410D-B16C-BFB94CB9706D}"/>
-              </a:ext>
-            </a:extLst>
-          </p:cNvPr>
-          <p:cNvSpPr/>
-          <p:nvPr/>
-        </p:nvSpPr>
-        <p:spPr>
-          <a:xfrm>
-            <a:off x="265814" y="191386"/>
-            <a:ext cx="9409814" cy="6464595"/>
-          </a:xfrm>
-          <a:prstGeom prst="rect">
-            <a:avLst/>
-          </a:prstGeom>
-          <a:noFill/>
-          <a:ln w="127000">
-            <a:solidFill>
-              <a:srgbClr val="00B050"/>
-            </a:solidFill>
-          </a:ln>
-        </p:spPr>
-        <p:style>
-          <a:lnRef idx="2">
-            <a:schemeClr val="accent1">
-              <a:shade val="50000"/>
-            </a:schemeClr>
-          </a:lnRef>
-          <a:fillRef idx="1">
-            <a:schemeClr val="accent1"/>
-          </a:fillRef>
-          <a:effectRef idx="0">
-            <a:schemeClr val="accent1"/>
-          </a:effectRef>
-          <a:fontRef idx="minor">
-            <a:schemeClr val="lt1"/>
-          </a:fontRef>
-        </p:style>
-        <p:txBody>
-          <a:bodyPr rtlCol="0" anchor="ctr"/>
-          <a:lstStyle/>
-          <a:p>
-            <a:pPr algn="ctr"/>
-            <a:endParaRPr lang="de-AT"/>
-          </a:p>
-        </p:txBody>
-      </p:sp>
-      <p:sp>
-        <p:nvSpPr>
-          <p:cNvPr id="4" name="Textfeld 3">
-            <a:extLst>
-              <a:ext uri="{FF2B5EF4-FFF2-40B4-BE49-F238E27FC236}">
-                <a16:creationId xmlns:a16="http://schemas.microsoft.com/office/drawing/2014/main" id="{DBDB1E4C-ABEE-4687-A2D6-6188FBCCE681}"/>
-              </a:ext>
-            </a:extLst>
-          </p:cNvPr>
-          <p:cNvSpPr txBox="1"/>
-          <p:nvPr/>
-        </p:nvSpPr>
-        <p:spPr>
-          <a:xfrm>
-            <a:off x="0" y="362310"/>
-            <a:ext cx="9905999" cy="5709255"/>
-          </a:xfrm>
-          <a:prstGeom prst="rect">
-            <a:avLst/>
-          </a:prstGeom>
-          <a:noFill/>
-        </p:spPr>
-        <p:txBody>
-          <a:bodyPr wrap="square" rtlCol="0">
-            <a:spAutoFit/>
-          </a:bodyPr>
-          <a:lstStyle/>
-          <a:p>
-            <a:pPr algn="ctr"/>
-            <a:r>
-              <a:rPr lang="de-AT" sz="19900" b="1" dirty="0"/>
-              <a:t>ID</a:t>
-            </a:r>
-          </a:p>
-          <a:p>
-            <a:pPr algn="ctr"/>
-            <a:r>
-              <a:rPr lang="de-AT" sz="16600" b="1" dirty="0"/>
-              <a:t>360 - 379</a:t>
-            </a:r>
-            <a:endParaRPr lang="de-AT" sz="19900" b="1" dirty="0"/>
-          </a:p>
-        </p:txBody>
-      </p:sp>
-    </p:spTree>
-    <p:extLst>
-      <p:ext uri="{BB962C8B-B14F-4D97-AF65-F5344CB8AC3E}">
-        <p14:creationId xmlns:p14="http://schemas.microsoft.com/office/powerpoint/2010/main" val="2099597170"/>
-      </p:ext>
-    </p:extLst>
-  </p:cSld>
-  <p:clrMapOvr>
-    <a:masterClrMapping/>
-  </p:clrMapOvr>
-</p:sld>
-</file>
-
-<file path=ppt/slides/slide24.xml><?xml version="1.0" encoding="utf-8"?>
-<p:sld xmlns:a="http://schemas.openxmlformats.org/drawingml/2006/main" xmlns:r="http://schemas.openxmlformats.org/officeDocument/2006/relationships" xmlns:p="http://schemas.openxmlformats.org/presentationml/2006/main">
-  <p:cSld>
-    <p:spTree>
-      <p:nvGrpSpPr>
-        <p:cNvPr id="1" name=""/>
-        <p:cNvGrpSpPr/>
-        <p:nvPr/>
-      </p:nvGrpSpPr>
-      <p:grpSpPr>
-        <a:xfrm>
-          <a:off x="0" y="0"/>
-          <a:ext cx="0" cy="0"/>
-          <a:chOff x="0" y="0"/>
-          <a:chExt cx="0" cy="0"/>
-        </a:xfrm>
-      </p:grpSpPr>
-      <p:sp>
-        <p:nvSpPr>
-          <p:cNvPr id="3" name="Rechteck 2">
-            <a:extLst>
-              <a:ext uri="{FF2B5EF4-FFF2-40B4-BE49-F238E27FC236}">
-                <a16:creationId xmlns:a16="http://schemas.microsoft.com/office/drawing/2014/main" id="{8C74AAB0-481A-410D-B16C-BFB94CB9706D}"/>
-              </a:ext>
-            </a:extLst>
-          </p:cNvPr>
-          <p:cNvSpPr/>
-          <p:nvPr/>
-        </p:nvSpPr>
-        <p:spPr>
-          <a:xfrm>
-            <a:off x="265814" y="191386"/>
-            <a:ext cx="9409814" cy="6464595"/>
-          </a:xfrm>
-          <a:prstGeom prst="rect">
-            <a:avLst/>
-          </a:prstGeom>
-          <a:noFill/>
-          <a:ln w="127000">
-            <a:solidFill>
-              <a:srgbClr val="00B050"/>
-            </a:solidFill>
-          </a:ln>
-        </p:spPr>
-        <p:style>
-          <a:lnRef idx="2">
-            <a:schemeClr val="accent1">
-              <a:shade val="50000"/>
-            </a:schemeClr>
-          </a:lnRef>
-          <a:fillRef idx="1">
-            <a:schemeClr val="accent1"/>
-          </a:fillRef>
-          <a:effectRef idx="0">
-            <a:schemeClr val="accent1"/>
-          </a:effectRef>
-          <a:fontRef idx="minor">
-            <a:schemeClr val="lt1"/>
-          </a:fontRef>
-        </p:style>
-        <p:txBody>
-          <a:bodyPr rtlCol="0" anchor="ctr"/>
-          <a:lstStyle/>
-          <a:p>
-            <a:pPr algn="ctr"/>
-            <a:endParaRPr lang="de-AT"/>
-          </a:p>
-        </p:txBody>
-      </p:sp>
-      <p:sp>
-        <p:nvSpPr>
-          <p:cNvPr id="4" name="Textfeld 3">
-            <a:extLst>
-              <a:ext uri="{FF2B5EF4-FFF2-40B4-BE49-F238E27FC236}">
-                <a16:creationId xmlns:a16="http://schemas.microsoft.com/office/drawing/2014/main" id="{DBDB1E4C-ABEE-4687-A2D6-6188FBCCE681}"/>
-              </a:ext>
-            </a:extLst>
-          </p:cNvPr>
-          <p:cNvSpPr txBox="1"/>
-          <p:nvPr/>
-        </p:nvSpPr>
-        <p:spPr>
-          <a:xfrm>
-            <a:off x="0" y="362310"/>
-            <a:ext cx="9905999" cy="5709255"/>
-          </a:xfrm>
-          <a:prstGeom prst="rect">
-            <a:avLst/>
-          </a:prstGeom>
-          <a:noFill/>
-        </p:spPr>
-        <p:txBody>
-          <a:bodyPr wrap="square" rtlCol="0">
-            <a:spAutoFit/>
-          </a:bodyPr>
-          <a:lstStyle/>
-          <a:p>
-            <a:pPr algn="ctr"/>
-            <a:r>
-              <a:rPr lang="de-AT" sz="19900" b="1" dirty="0"/>
-              <a:t>ID</a:t>
-            </a:r>
-          </a:p>
-          <a:p>
-            <a:pPr algn="ctr"/>
-            <a:r>
-              <a:rPr lang="de-AT" sz="16600" b="1" dirty="0"/>
-              <a:t>380 - 399</a:t>
-            </a:r>
-            <a:endParaRPr lang="de-AT" sz="19900" b="1" dirty="0"/>
-          </a:p>
-        </p:txBody>
-      </p:sp>
-    </p:spTree>
-    <p:extLst>
-      <p:ext uri="{BB962C8B-B14F-4D97-AF65-F5344CB8AC3E}">
-        <p14:creationId xmlns:p14="http://schemas.microsoft.com/office/powerpoint/2010/main" val="3345972224"/>
-      </p:ext>
-    </p:extLst>
-  </p:cSld>
-  <p:clrMapOvr>
-    <a:masterClrMapping/>
-  </p:clrMapOvr>
-</p:sld>
-</file>
-
-<file path=ppt/slides/slide25.xml><?xml version="1.0" encoding="utf-8"?>
-<p:sld xmlns:a="http://schemas.openxmlformats.org/drawingml/2006/main" xmlns:r="http://schemas.openxmlformats.org/officeDocument/2006/relationships" xmlns:p="http://schemas.openxmlformats.org/presentationml/2006/main">
-  <p:cSld>
-    <p:spTree>
-      <p:nvGrpSpPr>
-        <p:cNvPr id="1" name=""/>
-        <p:cNvGrpSpPr/>
-        <p:nvPr/>
-      </p:nvGrpSpPr>
-      <p:grpSpPr>
-        <a:xfrm>
-          <a:off x="0" y="0"/>
-          <a:ext cx="0" cy="0"/>
-          <a:chOff x="0" y="0"/>
-          <a:chExt cx="0" cy="0"/>
-        </a:xfrm>
-      </p:grpSpPr>
-      <p:sp>
-        <p:nvSpPr>
-          <p:cNvPr id="3" name="Rechteck 2">
-            <a:extLst>
-              <a:ext uri="{FF2B5EF4-FFF2-40B4-BE49-F238E27FC236}">
-                <a16:creationId xmlns:a16="http://schemas.microsoft.com/office/drawing/2014/main" id="{8C74AAB0-481A-410D-B16C-BFB94CB9706D}"/>
-              </a:ext>
-            </a:extLst>
-          </p:cNvPr>
-          <p:cNvSpPr/>
-          <p:nvPr/>
-        </p:nvSpPr>
-        <p:spPr>
-          <a:xfrm>
-            <a:off x="265814" y="191386"/>
-            <a:ext cx="9409814" cy="6464595"/>
-          </a:xfrm>
-          <a:prstGeom prst="rect">
-            <a:avLst/>
-          </a:prstGeom>
-          <a:noFill/>
-          <a:ln w="127000">
-            <a:solidFill>
-              <a:srgbClr val="00B050"/>
-            </a:solidFill>
-          </a:ln>
-        </p:spPr>
-        <p:style>
-          <a:lnRef idx="2">
-            <a:schemeClr val="accent1">
-              <a:shade val="50000"/>
-            </a:schemeClr>
-          </a:lnRef>
-          <a:fillRef idx="1">
-            <a:schemeClr val="accent1"/>
-          </a:fillRef>
-          <a:effectRef idx="0">
-            <a:schemeClr val="accent1"/>
-          </a:effectRef>
-          <a:fontRef idx="minor">
-            <a:schemeClr val="lt1"/>
-          </a:fontRef>
-        </p:style>
-        <p:txBody>
-          <a:bodyPr rtlCol="0" anchor="ctr"/>
-          <a:lstStyle/>
-          <a:p>
-            <a:pPr algn="ctr"/>
-            <a:endParaRPr lang="de-AT"/>
-          </a:p>
-        </p:txBody>
-      </p:sp>
-      <p:sp>
-        <p:nvSpPr>
-          <p:cNvPr id="4" name="Textfeld 3">
-            <a:extLst>
-              <a:ext uri="{FF2B5EF4-FFF2-40B4-BE49-F238E27FC236}">
-                <a16:creationId xmlns:a16="http://schemas.microsoft.com/office/drawing/2014/main" id="{DBDB1E4C-ABEE-4687-A2D6-6188FBCCE681}"/>
-              </a:ext>
-            </a:extLst>
-          </p:cNvPr>
-          <p:cNvSpPr txBox="1"/>
-          <p:nvPr/>
-        </p:nvSpPr>
-        <p:spPr>
-          <a:xfrm>
-            <a:off x="0" y="362310"/>
-            <a:ext cx="9905999" cy="5709255"/>
-          </a:xfrm>
-          <a:prstGeom prst="rect">
-            <a:avLst/>
-          </a:prstGeom>
-          <a:noFill/>
-        </p:spPr>
-        <p:txBody>
-          <a:bodyPr wrap="square" rtlCol="0">
-            <a:spAutoFit/>
-          </a:bodyPr>
-          <a:lstStyle/>
-          <a:p>
-            <a:pPr algn="ctr"/>
-            <a:r>
-              <a:rPr lang="de-AT" sz="19900" b="1" dirty="0"/>
-              <a:t>ID</a:t>
-            </a:r>
-          </a:p>
-          <a:p>
-            <a:pPr algn="ctr"/>
-            <a:r>
-              <a:rPr lang="de-AT" sz="16600" b="1" dirty="0"/>
-              <a:t>400 - 419</a:t>
-            </a:r>
-            <a:endParaRPr lang="de-AT" sz="19900" b="1" dirty="0"/>
-          </a:p>
-        </p:txBody>
-      </p:sp>
-    </p:spTree>
-    <p:extLst>
-      <p:ext uri="{BB962C8B-B14F-4D97-AF65-F5344CB8AC3E}">
-        <p14:creationId xmlns:p14="http://schemas.microsoft.com/office/powerpoint/2010/main" val="3715582185"/>
-      </p:ext>
-    </p:extLst>
-  </p:cSld>
-  <p:clrMapOvr>
-    <a:masterClrMapping/>
-  </p:clrMapOvr>
-</p:sld>
-</file>
-
-<file path=ppt/slides/slide26.xml><?xml version="1.0" encoding="utf-8"?>
-<p:sld xmlns:a="http://schemas.openxmlformats.org/drawingml/2006/main" xmlns:r="http://schemas.openxmlformats.org/officeDocument/2006/relationships" xmlns:p="http://schemas.openxmlformats.org/presentationml/2006/main">
-  <p:cSld>
-    <p:spTree>
-      <p:nvGrpSpPr>
-        <p:cNvPr id="1" name=""/>
-        <p:cNvGrpSpPr/>
-        <p:nvPr/>
-      </p:nvGrpSpPr>
-      <p:grpSpPr>
-        <a:xfrm>
-          <a:off x="0" y="0"/>
-          <a:ext cx="0" cy="0"/>
-          <a:chOff x="0" y="0"/>
-          <a:chExt cx="0" cy="0"/>
-        </a:xfrm>
-      </p:grpSpPr>
-      <p:sp>
-        <p:nvSpPr>
-          <p:cNvPr id="3" name="Rechteck 2">
-            <a:extLst>
-              <a:ext uri="{FF2B5EF4-FFF2-40B4-BE49-F238E27FC236}">
-                <a16:creationId xmlns:a16="http://schemas.microsoft.com/office/drawing/2014/main" id="{8C74AAB0-481A-410D-B16C-BFB94CB9706D}"/>
-              </a:ext>
-            </a:extLst>
-          </p:cNvPr>
-          <p:cNvSpPr/>
-          <p:nvPr/>
-        </p:nvSpPr>
-        <p:spPr>
-          <a:xfrm>
-            <a:off x="265814" y="191386"/>
-            <a:ext cx="9409814" cy="6464595"/>
-          </a:xfrm>
-          <a:prstGeom prst="rect">
-            <a:avLst/>
-          </a:prstGeom>
-          <a:noFill/>
-          <a:ln w="127000">
-            <a:solidFill>
-              <a:srgbClr val="00B050"/>
-            </a:solidFill>
-          </a:ln>
-        </p:spPr>
-        <p:style>
-          <a:lnRef idx="2">
-            <a:schemeClr val="accent1">
-              <a:shade val="50000"/>
-            </a:schemeClr>
-          </a:lnRef>
-          <a:fillRef idx="1">
-            <a:schemeClr val="accent1"/>
-          </a:fillRef>
-          <a:effectRef idx="0">
-            <a:schemeClr val="accent1"/>
-          </a:effectRef>
-          <a:fontRef idx="minor">
-            <a:schemeClr val="lt1"/>
-          </a:fontRef>
-        </p:style>
-        <p:txBody>
-          <a:bodyPr rtlCol="0" anchor="ctr"/>
-          <a:lstStyle/>
-          <a:p>
-            <a:pPr algn="ctr"/>
-            <a:endParaRPr lang="de-AT"/>
-          </a:p>
-        </p:txBody>
-      </p:sp>
-      <p:sp>
-        <p:nvSpPr>
-          <p:cNvPr id="4" name="Textfeld 3">
-            <a:extLst>
-              <a:ext uri="{FF2B5EF4-FFF2-40B4-BE49-F238E27FC236}">
-                <a16:creationId xmlns:a16="http://schemas.microsoft.com/office/drawing/2014/main" id="{DBDB1E4C-ABEE-4687-A2D6-6188FBCCE681}"/>
-              </a:ext>
-            </a:extLst>
-          </p:cNvPr>
-          <p:cNvSpPr txBox="1"/>
-          <p:nvPr/>
-        </p:nvSpPr>
-        <p:spPr>
-          <a:xfrm>
-            <a:off x="0" y="362310"/>
-            <a:ext cx="9905999" cy="5709255"/>
-          </a:xfrm>
-          <a:prstGeom prst="rect">
-            <a:avLst/>
-          </a:prstGeom>
-          <a:noFill/>
-        </p:spPr>
-        <p:txBody>
-          <a:bodyPr wrap="square" rtlCol="0">
-            <a:spAutoFit/>
-          </a:bodyPr>
-          <a:lstStyle/>
-          <a:p>
-            <a:pPr algn="ctr"/>
-            <a:r>
-              <a:rPr lang="de-AT" sz="19900" b="1" dirty="0"/>
-              <a:t>ID</a:t>
-            </a:r>
-          </a:p>
-          <a:p>
-            <a:pPr algn="ctr"/>
-            <a:r>
-              <a:rPr lang="de-AT" sz="16600" b="1" dirty="0"/>
-              <a:t>420 - 439</a:t>
-            </a:r>
-            <a:endParaRPr lang="de-AT" sz="19900" b="1" dirty="0"/>
-          </a:p>
-        </p:txBody>
-      </p:sp>
-    </p:spTree>
-    <p:extLst>
-      <p:ext uri="{BB962C8B-B14F-4D97-AF65-F5344CB8AC3E}">
-        <p14:creationId xmlns:p14="http://schemas.microsoft.com/office/powerpoint/2010/main" val="4210198236"/>
-      </p:ext>
-    </p:extLst>
-  </p:cSld>
-  <p:clrMapOvr>
-    <a:masterClrMapping/>
-  </p:clrMapOvr>
-</p:sld>
-</file>
-
-<file path=ppt/slides/slide27.xml><?xml version="1.0" encoding="utf-8"?>
-<p:sld xmlns:a="http://schemas.openxmlformats.org/drawingml/2006/main" xmlns:r="http://schemas.openxmlformats.org/officeDocument/2006/relationships" xmlns:p="http://schemas.openxmlformats.org/presentationml/2006/main">
-  <p:cSld>
-    <p:spTree>
-      <p:nvGrpSpPr>
-        <p:cNvPr id="1" name=""/>
-        <p:cNvGrpSpPr/>
-        <p:nvPr/>
-      </p:nvGrpSpPr>
-      <p:grpSpPr>
-        <a:xfrm>
-          <a:off x="0" y="0"/>
-          <a:ext cx="0" cy="0"/>
-          <a:chOff x="0" y="0"/>
-          <a:chExt cx="0" cy="0"/>
-        </a:xfrm>
-      </p:grpSpPr>
-      <p:sp>
-        <p:nvSpPr>
-          <p:cNvPr id="3" name="Rechteck 2">
-            <a:extLst>
-              <a:ext uri="{FF2B5EF4-FFF2-40B4-BE49-F238E27FC236}">
-                <a16:creationId xmlns:a16="http://schemas.microsoft.com/office/drawing/2014/main" id="{8C74AAB0-481A-410D-B16C-BFB94CB9706D}"/>
-              </a:ext>
-            </a:extLst>
-          </p:cNvPr>
-          <p:cNvSpPr/>
-          <p:nvPr/>
-        </p:nvSpPr>
-        <p:spPr>
-          <a:xfrm>
-            <a:off x="265814" y="191386"/>
-            <a:ext cx="9409814" cy="6464595"/>
-          </a:xfrm>
-          <a:prstGeom prst="rect">
-            <a:avLst/>
-          </a:prstGeom>
-          <a:noFill/>
-          <a:ln w="127000">
-            <a:solidFill>
-              <a:srgbClr val="00B050"/>
-            </a:solidFill>
-          </a:ln>
-        </p:spPr>
-        <p:style>
-          <a:lnRef idx="2">
-            <a:schemeClr val="accent1">
-              <a:shade val="50000"/>
-            </a:schemeClr>
-          </a:lnRef>
-          <a:fillRef idx="1">
-            <a:schemeClr val="accent1"/>
-          </a:fillRef>
-          <a:effectRef idx="0">
-            <a:schemeClr val="accent1"/>
-          </a:effectRef>
-          <a:fontRef idx="minor">
-            <a:schemeClr val="lt1"/>
-          </a:fontRef>
-        </p:style>
-        <p:txBody>
-          <a:bodyPr rtlCol="0" anchor="ctr"/>
-          <a:lstStyle/>
-          <a:p>
-            <a:pPr algn="ctr"/>
-            <a:endParaRPr lang="de-AT"/>
-          </a:p>
-        </p:txBody>
-      </p:sp>
-      <p:sp>
-        <p:nvSpPr>
-          <p:cNvPr id="4" name="Textfeld 3">
-            <a:extLst>
-              <a:ext uri="{FF2B5EF4-FFF2-40B4-BE49-F238E27FC236}">
-                <a16:creationId xmlns:a16="http://schemas.microsoft.com/office/drawing/2014/main" id="{DBDB1E4C-ABEE-4687-A2D6-6188FBCCE681}"/>
-              </a:ext>
-            </a:extLst>
-          </p:cNvPr>
-          <p:cNvSpPr txBox="1"/>
-          <p:nvPr/>
-        </p:nvSpPr>
-        <p:spPr>
-          <a:xfrm>
-            <a:off x="0" y="362310"/>
-            <a:ext cx="9905999" cy="5709255"/>
-          </a:xfrm>
-          <a:prstGeom prst="rect">
-            <a:avLst/>
-          </a:prstGeom>
-          <a:noFill/>
-        </p:spPr>
-        <p:txBody>
-          <a:bodyPr wrap="square" rtlCol="0">
-            <a:spAutoFit/>
-          </a:bodyPr>
-          <a:lstStyle/>
-          <a:p>
-            <a:pPr algn="ctr"/>
-            <a:r>
-              <a:rPr lang="de-AT" sz="19900" b="1" dirty="0"/>
-              <a:t>ID</a:t>
-            </a:r>
-          </a:p>
-          <a:p>
-            <a:pPr algn="ctr"/>
-            <a:r>
-              <a:rPr lang="de-AT" sz="16600" b="1" dirty="0"/>
-              <a:t>440 - 459</a:t>
-            </a:r>
-            <a:endParaRPr lang="de-AT" sz="19900" b="1" dirty="0"/>
-          </a:p>
-        </p:txBody>
-      </p:sp>
-    </p:spTree>
-    <p:extLst>
-      <p:ext uri="{BB962C8B-B14F-4D97-AF65-F5344CB8AC3E}">
-        <p14:creationId xmlns:p14="http://schemas.microsoft.com/office/powerpoint/2010/main" val="641480740"/>
-      </p:ext>
-    </p:extLst>
-  </p:cSld>
-  <p:clrMapOvr>
-    <a:masterClrMapping/>
-  </p:clrMapOvr>
-</p:sld>
-</file>
-
-<file path=ppt/slides/slide28.xml><?xml version="1.0" encoding="utf-8"?>
-<p:sld xmlns:a="http://schemas.openxmlformats.org/drawingml/2006/main" xmlns:r="http://schemas.openxmlformats.org/officeDocument/2006/relationships" xmlns:p="http://schemas.openxmlformats.org/presentationml/2006/main">
-  <p:cSld>
-    <p:spTree>
-      <p:nvGrpSpPr>
-        <p:cNvPr id="1" name=""/>
-        <p:cNvGrpSpPr/>
-        <p:nvPr/>
-      </p:nvGrpSpPr>
-      <p:grpSpPr>
-        <a:xfrm>
-          <a:off x="0" y="0"/>
-          <a:ext cx="0" cy="0"/>
-          <a:chOff x="0" y="0"/>
-          <a:chExt cx="0" cy="0"/>
-        </a:xfrm>
-      </p:grpSpPr>
-      <p:sp>
-        <p:nvSpPr>
-          <p:cNvPr id="3" name="Rechteck 2">
-            <a:extLst>
-              <a:ext uri="{FF2B5EF4-FFF2-40B4-BE49-F238E27FC236}">
-                <a16:creationId xmlns:a16="http://schemas.microsoft.com/office/drawing/2014/main" id="{8C74AAB0-481A-410D-B16C-BFB94CB9706D}"/>
-              </a:ext>
-            </a:extLst>
-          </p:cNvPr>
-          <p:cNvSpPr/>
-          <p:nvPr/>
-        </p:nvSpPr>
-        <p:spPr>
-          <a:xfrm>
-            <a:off x="265814" y="191386"/>
-            <a:ext cx="9409814" cy="6464595"/>
-          </a:xfrm>
-          <a:prstGeom prst="rect">
-            <a:avLst/>
-          </a:prstGeom>
-          <a:noFill/>
-          <a:ln w="127000">
-            <a:solidFill>
-              <a:srgbClr val="00B050"/>
-            </a:solidFill>
-          </a:ln>
-        </p:spPr>
-        <p:style>
-          <a:lnRef idx="2">
-            <a:schemeClr val="accent1">
-              <a:shade val="50000"/>
-            </a:schemeClr>
-          </a:lnRef>
-          <a:fillRef idx="1">
-            <a:schemeClr val="accent1"/>
-          </a:fillRef>
-          <a:effectRef idx="0">
-            <a:schemeClr val="accent1"/>
-          </a:effectRef>
-          <a:fontRef idx="minor">
-            <a:schemeClr val="lt1"/>
-          </a:fontRef>
-        </p:style>
-        <p:txBody>
-          <a:bodyPr rtlCol="0" anchor="ctr"/>
-          <a:lstStyle/>
-          <a:p>
-            <a:pPr algn="ctr"/>
-            <a:endParaRPr lang="de-AT"/>
-          </a:p>
-        </p:txBody>
-      </p:sp>
-      <p:sp>
-        <p:nvSpPr>
-          <p:cNvPr id="4" name="Textfeld 3">
-            <a:extLst>
-              <a:ext uri="{FF2B5EF4-FFF2-40B4-BE49-F238E27FC236}">
-                <a16:creationId xmlns:a16="http://schemas.microsoft.com/office/drawing/2014/main" id="{DBDB1E4C-ABEE-4687-A2D6-6188FBCCE681}"/>
-              </a:ext>
-            </a:extLst>
-          </p:cNvPr>
-          <p:cNvSpPr txBox="1"/>
-          <p:nvPr/>
-        </p:nvSpPr>
-        <p:spPr>
-          <a:xfrm>
-            <a:off x="0" y="362310"/>
-            <a:ext cx="9905999" cy="5709255"/>
-          </a:xfrm>
-          <a:prstGeom prst="rect">
-            <a:avLst/>
-          </a:prstGeom>
-          <a:noFill/>
-        </p:spPr>
-        <p:txBody>
-          <a:bodyPr wrap="square" rtlCol="0">
-            <a:spAutoFit/>
-          </a:bodyPr>
-          <a:lstStyle/>
-          <a:p>
-            <a:pPr algn="ctr"/>
-            <a:r>
-              <a:rPr lang="de-AT" sz="19900" b="1" dirty="0"/>
-              <a:t>ID</a:t>
-            </a:r>
-          </a:p>
-          <a:p>
-            <a:pPr algn="ctr"/>
-            <a:r>
-              <a:rPr lang="de-AT" sz="16600" b="1" dirty="0"/>
-              <a:t>460 - 479</a:t>
-            </a:r>
-            <a:endParaRPr lang="de-AT" sz="19900" b="1" dirty="0"/>
-          </a:p>
-        </p:txBody>
-      </p:sp>
-    </p:spTree>
-    <p:extLst>
-      <p:ext uri="{BB962C8B-B14F-4D97-AF65-F5344CB8AC3E}">
-        <p14:creationId xmlns:p14="http://schemas.microsoft.com/office/powerpoint/2010/main" val="586820674"/>
-      </p:ext>
-    </p:extLst>
-  </p:cSld>
-  <p:clrMapOvr>
-    <a:masterClrMapping/>
-  </p:clrMapOvr>
-</p:sld>
-</file>
-
-<file path=ppt/slides/slide29.xml><?xml version="1.0" encoding="utf-8"?>
-<p:sld xmlns:a="http://schemas.openxmlformats.org/drawingml/2006/main" xmlns:r="http://schemas.openxmlformats.org/officeDocument/2006/relationships" xmlns:p="http://schemas.openxmlformats.org/presentationml/2006/main">
-  <p:cSld>
-    <p:spTree>
-      <p:nvGrpSpPr>
-        <p:cNvPr id="1" name=""/>
-        <p:cNvGrpSpPr/>
-        <p:nvPr/>
-      </p:nvGrpSpPr>
-      <p:grpSpPr>
-        <a:xfrm>
-          <a:off x="0" y="0"/>
-          <a:ext cx="0" cy="0"/>
-          <a:chOff x="0" y="0"/>
-          <a:chExt cx="0" cy="0"/>
-        </a:xfrm>
-      </p:grpSpPr>
-      <p:sp>
-        <p:nvSpPr>
-          <p:cNvPr id="3" name="Rechteck 2">
-            <a:extLst>
-              <a:ext uri="{FF2B5EF4-FFF2-40B4-BE49-F238E27FC236}">
-                <a16:creationId xmlns:a16="http://schemas.microsoft.com/office/drawing/2014/main" id="{8C74AAB0-481A-410D-B16C-BFB94CB9706D}"/>
-              </a:ext>
-            </a:extLst>
-          </p:cNvPr>
-          <p:cNvSpPr/>
-          <p:nvPr/>
-        </p:nvSpPr>
-        <p:spPr>
-          <a:xfrm>
-            <a:off x="265814" y="191386"/>
-            <a:ext cx="9409814" cy="6464595"/>
-          </a:xfrm>
-          <a:prstGeom prst="rect">
-            <a:avLst/>
-          </a:prstGeom>
-          <a:noFill/>
-          <a:ln w="127000">
-            <a:solidFill>
-              <a:srgbClr val="00B050"/>
-            </a:solidFill>
-          </a:ln>
-        </p:spPr>
-        <p:style>
-          <a:lnRef idx="2">
-            <a:schemeClr val="accent1">
-              <a:shade val="50000"/>
-            </a:schemeClr>
-          </a:lnRef>
-          <a:fillRef idx="1">
-            <a:schemeClr val="accent1"/>
-          </a:fillRef>
-          <a:effectRef idx="0">
-            <a:schemeClr val="accent1"/>
-          </a:effectRef>
-          <a:fontRef idx="minor">
-            <a:schemeClr val="lt1"/>
-          </a:fontRef>
-        </p:style>
-        <p:txBody>
-          <a:bodyPr rtlCol="0" anchor="ctr"/>
-          <a:lstStyle/>
-          <a:p>
-            <a:pPr algn="ctr"/>
-            <a:endParaRPr lang="de-AT"/>
-          </a:p>
-        </p:txBody>
-      </p:sp>
-      <p:sp>
-        <p:nvSpPr>
-          <p:cNvPr id="4" name="Textfeld 3">
-            <a:extLst>
-              <a:ext uri="{FF2B5EF4-FFF2-40B4-BE49-F238E27FC236}">
-                <a16:creationId xmlns:a16="http://schemas.microsoft.com/office/drawing/2014/main" id="{DBDB1E4C-ABEE-4687-A2D6-6188FBCCE681}"/>
-              </a:ext>
-            </a:extLst>
-          </p:cNvPr>
-          <p:cNvSpPr txBox="1"/>
-          <p:nvPr/>
-        </p:nvSpPr>
-        <p:spPr>
-          <a:xfrm>
-            <a:off x="0" y="362310"/>
-            <a:ext cx="9905999" cy="5709255"/>
-          </a:xfrm>
-          <a:prstGeom prst="rect">
-            <a:avLst/>
-          </a:prstGeom>
-          <a:noFill/>
-        </p:spPr>
-        <p:txBody>
-          <a:bodyPr wrap="square" rtlCol="0">
-            <a:spAutoFit/>
-          </a:bodyPr>
-          <a:lstStyle/>
-          <a:p>
-            <a:pPr algn="ctr"/>
-            <a:r>
-              <a:rPr lang="de-AT" sz="19900" b="1" dirty="0"/>
-              <a:t>ID</a:t>
-            </a:r>
-          </a:p>
-          <a:p>
-            <a:pPr algn="ctr"/>
-            <a:r>
-              <a:rPr lang="de-AT" sz="16600" b="1" dirty="0"/>
-              <a:t>480 - 499</a:t>
-            </a:r>
-            <a:endParaRPr lang="de-AT" sz="19900" b="1" dirty="0"/>
-          </a:p>
-        </p:txBody>
-      </p:sp>
-    </p:spTree>
-    <p:extLst>
-      <p:ext uri="{BB962C8B-B14F-4D97-AF65-F5344CB8AC3E}">
-        <p14:creationId xmlns:p14="http://schemas.microsoft.com/office/powerpoint/2010/main" val="941615846"/>
       </p:ext>
     </p:extLst>
   </p:cSld>
@@ -6361,12 +3857,18 @@
 </p:sld>
 </file>
 
-<file path=ppt/slides/slide30.xml><?xml version="1.0" encoding="utf-8"?>
+<file path=ppt/slides/slide4.xml><?xml version="1.0" encoding="utf-8"?>
 <p:sld xmlns:a="http://schemas.openxmlformats.org/drawingml/2006/main" xmlns:r="http://schemas.openxmlformats.org/officeDocument/2006/relationships" xmlns:p="http://schemas.openxmlformats.org/presentationml/2006/main">
   <p:cSld>
     <p:spTree>
       <p:nvGrpSpPr>
-        <p:cNvPr id="1" name=""/>
+        <p:cNvPr id="1" name="">
+          <a:extLst>
+            <a:ext uri="{FF2B5EF4-FFF2-40B4-BE49-F238E27FC236}">
+              <a16:creationId xmlns:a16="http://schemas.microsoft.com/office/drawing/2014/main" id="{25C65A58-1284-6277-C85E-613E2B066090}"/>
+            </a:ext>
+          </a:extLst>
+        </p:cNvPr>
         <p:cNvGrpSpPr/>
         <p:nvPr/>
       </p:nvGrpSpPr>
@@ -6380,10 +3882,54 @@
       </p:grpSpPr>
       <p:sp>
         <p:nvSpPr>
+          <p:cNvPr id="2" name="Textfeld 1">
+            <a:extLst>
+              <a:ext uri="{FF2B5EF4-FFF2-40B4-BE49-F238E27FC236}">
+                <a16:creationId xmlns:a16="http://schemas.microsoft.com/office/drawing/2014/main" id="{D7085DD6-3057-FFEC-9BFE-1D48E5BD2DF6}"/>
+              </a:ext>
+            </a:extLst>
+          </p:cNvPr>
+          <p:cNvSpPr txBox="1"/>
+          <p:nvPr/>
+        </p:nvSpPr>
+        <p:spPr>
+          <a:xfrm>
+            <a:off x="0" y="0"/>
+            <a:ext cx="9905999" cy="6217087"/>
+          </a:xfrm>
+          <a:prstGeom prst="rect">
+            <a:avLst/>
+          </a:prstGeom>
+          <a:noFill/>
+        </p:spPr>
+        <p:txBody>
+          <a:bodyPr wrap="square" rtlCol="0">
+            <a:spAutoFit/>
+          </a:bodyPr>
+          <a:lstStyle/>
+          <a:p>
+            <a:pPr algn="ctr"/>
+            <a:r>
+              <a:rPr lang="de-AT" sz="19900" b="1" dirty="0"/>
+              <a:t>ID</a:t>
+            </a:r>
+          </a:p>
+          <a:p>
+            <a:pPr algn="ctr"/>
+            <a:r>
+              <a:rPr lang="de-AT" sz="19900" b="1" dirty="0"/>
+              <a:t>-</a:t>
+            </a:r>
+            <a:endParaRPr lang="de-AT" sz="23900" b="1" dirty="0"/>
+          </a:p>
+        </p:txBody>
+      </p:sp>
+      <p:sp>
+        <p:nvSpPr>
           <p:cNvPr id="3" name="Rechteck 2">
             <a:extLst>
               <a:ext uri="{FF2B5EF4-FFF2-40B4-BE49-F238E27FC236}">
-                <a16:creationId xmlns:a16="http://schemas.microsoft.com/office/drawing/2014/main" id="{8C74AAB0-481A-410D-B16C-BFB94CB9706D}"/>
+                <a16:creationId xmlns:a16="http://schemas.microsoft.com/office/drawing/2014/main" id="{81382650-BFF9-D0A7-EA80-966BB0EA63AD}"/>
               </a:ext>
             </a:extLst>
           </p:cNvPr>
@@ -6430,786 +3976,10 @@
           </a:p>
         </p:txBody>
       </p:sp>
-      <p:sp>
-        <p:nvSpPr>
-          <p:cNvPr id="4" name="Textfeld 3">
-            <a:extLst>
-              <a:ext uri="{FF2B5EF4-FFF2-40B4-BE49-F238E27FC236}">
-                <a16:creationId xmlns:a16="http://schemas.microsoft.com/office/drawing/2014/main" id="{DBDB1E4C-ABEE-4687-A2D6-6188FBCCE681}"/>
-              </a:ext>
-            </a:extLst>
-          </p:cNvPr>
-          <p:cNvSpPr txBox="1"/>
-          <p:nvPr/>
-        </p:nvSpPr>
-        <p:spPr>
-          <a:xfrm>
-            <a:off x="0" y="362310"/>
-            <a:ext cx="9905999" cy="5709255"/>
-          </a:xfrm>
-          <a:prstGeom prst="rect">
-            <a:avLst/>
-          </a:prstGeom>
-          <a:noFill/>
-        </p:spPr>
-        <p:txBody>
-          <a:bodyPr wrap="square" rtlCol="0">
-            <a:spAutoFit/>
-          </a:bodyPr>
-          <a:lstStyle/>
-          <a:p>
-            <a:pPr algn="ctr"/>
-            <a:r>
-              <a:rPr lang="de-AT" sz="19900" b="1" dirty="0"/>
-              <a:t>ID</a:t>
-            </a:r>
-          </a:p>
-          <a:p>
-            <a:pPr algn="ctr"/>
-            <a:r>
-              <a:rPr lang="de-AT" sz="16600" b="1"/>
-              <a:t>ab 500</a:t>
-            </a:r>
-            <a:endParaRPr lang="de-AT" sz="19900" b="1" dirty="0"/>
-          </a:p>
-        </p:txBody>
-      </p:sp>
-    </p:spTree>
-    <p:extLst>
-      <p:ext uri="{BB962C8B-B14F-4D97-AF65-F5344CB8AC3E}">
-        <p14:creationId xmlns:p14="http://schemas.microsoft.com/office/powerpoint/2010/main" val="3225933994"/>
-      </p:ext>
-    </p:extLst>
-  </p:cSld>
-  <p:clrMapOvr>
-    <a:masterClrMapping/>
-  </p:clrMapOvr>
-</p:sld>
-</file>
-
-<file path=ppt/slides/slide4.xml><?xml version="1.0" encoding="utf-8"?>
-<p:sld xmlns:a="http://schemas.openxmlformats.org/drawingml/2006/main" xmlns:r="http://schemas.openxmlformats.org/officeDocument/2006/relationships" xmlns:p="http://schemas.openxmlformats.org/presentationml/2006/main">
-  <p:cSld>
-    <p:spTree>
-      <p:nvGrpSpPr>
-        <p:cNvPr id="1" name="">
-          <a:extLst>
-            <a:ext uri="{FF2B5EF4-FFF2-40B4-BE49-F238E27FC236}">
-              <a16:creationId xmlns:a16="http://schemas.microsoft.com/office/drawing/2014/main" id="{25C65A58-1284-6277-C85E-613E2B066090}"/>
-            </a:ext>
-          </a:extLst>
-        </p:cNvPr>
-        <p:cNvGrpSpPr/>
-        <p:nvPr/>
-      </p:nvGrpSpPr>
-      <p:grpSpPr>
-        <a:xfrm>
-          <a:off x="0" y="0"/>
-          <a:ext cx="0" cy="0"/>
-          <a:chOff x="0" y="0"/>
-          <a:chExt cx="0" cy="0"/>
-        </a:xfrm>
-      </p:grpSpPr>
-      <p:sp>
-        <p:nvSpPr>
-          <p:cNvPr id="2" name="Textfeld 1">
-            <a:extLst>
-              <a:ext uri="{FF2B5EF4-FFF2-40B4-BE49-F238E27FC236}">
-                <a16:creationId xmlns:a16="http://schemas.microsoft.com/office/drawing/2014/main" id="{D7085DD6-3057-FFEC-9BFE-1D48E5BD2DF6}"/>
-              </a:ext>
-            </a:extLst>
-          </p:cNvPr>
-          <p:cNvSpPr txBox="1"/>
-          <p:nvPr/>
-        </p:nvSpPr>
-        <p:spPr>
-          <a:xfrm>
-            <a:off x="0" y="0"/>
-            <a:ext cx="9905999" cy="6217087"/>
-          </a:xfrm>
-          <a:prstGeom prst="rect">
-            <a:avLst/>
-          </a:prstGeom>
-          <a:noFill/>
-        </p:spPr>
-        <p:txBody>
-          <a:bodyPr wrap="square" rtlCol="0">
-            <a:spAutoFit/>
-          </a:bodyPr>
-          <a:lstStyle/>
-          <a:p>
-            <a:pPr algn="ctr"/>
-            <a:r>
-              <a:rPr lang="de-AT" sz="19900" b="1" dirty="0"/>
-              <a:t>ID</a:t>
-            </a:r>
-          </a:p>
-          <a:p>
-            <a:pPr algn="ctr"/>
-            <a:r>
-              <a:rPr lang="de-AT" sz="19900" b="1" dirty="0"/>
-              <a:t>-</a:t>
-            </a:r>
-            <a:endParaRPr lang="de-AT" sz="23900" b="1" dirty="0"/>
-          </a:p>
-        </p:txBody>
-      </p:sp>
-      <p:sp>
-        <p:nvSpPr>
-          <p:cNvPr id="3" name="Rechteck 2">
-            <a:extLst>
-              <a:ext uri="{FF2B5EF4-FFF2-40B4-BE49-F238E27FC236}">
-                <a16:creationId xmlns:a16="http://schemas.microsoft.com/office/drawing/2014/main" id="{81382650-BFF9-D0A7-EA80-966BB0EA63AD}"/>
-              </a:ext>
-            </a:extLst>
-          </p:cNvPr>
-          <p:cNvSpPr/>
-          <p:nvPr/>
-        </p:nvSpPr>
-        <p:spPr>
-          <a:xfrm>
-            <a:off x="265814" y="191386"/>
-            <a:ext cx="9409814" cy="6464595"/>
-          </a:xfrm>
-          <a:prstGeom prst="rect">
-            <a:avLst/>
-          </a:prstGeom>
-          <a:noFill/>
-          <a:ln w="127000">
-            <a:solidFill>
-              <a:srgbClr val="00B050"/>
-            </a:solidFill>
-          </a:ln>
-        </p:spPr>
-        <p:style>
-          <a:lnRef idx="2">
-            <a:schemeClr val="accent1">
-              <a:shade val="50000"/>
-            </a:schemeClr>
-          </a:lnRef>
-          <a:fillRef idx="1">
-            <a:schemeClr val="accent1"/>
-          </a:fillRef>
-          <a:effectRef idx="0">
-            <a:schemeClr val="accent1"/>
-          </a:effectRef>
-          <a:fontRef idx="minor">
-            <a:schemeClr val="lt1"/>
-          </a:fontRef>
-        </p:style>
-        <p:txBody>
-          <a:bodyPr rtlCol="0" anchor="ctr"/>
-          <a:lstStyle/>
-          <a:p>
-            <a:pPr algn="ctr"/>
-            <a:endParaRPr lang="de-AT"/>
-          </a:p>
-        </p:txBody>
-      </p:sp>
     </p:spTree>
     <p:extLst>
       <p:ext uri="{BB962C8B-B14F-4D97-AF65-F5344CB8AC3E}">
         <p14:creationId xmlns:p14="http://schemas.microsoft.com/office/powerpoint/2010/main" val="1598592999"/>
-      </p:ext>
-    </p:extLst>
-  </p:cSld>
-  <p:clrMapOvr>
-    <a:masterClrMapping/>
-  </p:clrMapOvr>
-</p:sld>
-</file>
-
-<file path=ppt/slides/slide5.xml><?xml version="1.0" encoding="utf-8"?>
-<p:sld xmlns:a="http://schemas.openxmlformats.org/drawingml/2006/main" xmlns:r="http://schemas.openxmlformats.org/officeDocument/2006/relationships" xmlns:p="http://schemas.openxmlformats.org/presentationml/2006/main">
-  <p:cSld>
-    <p:spTree>
-      <p:nvGrpSpPr>
-        <p:cNvPr id="1" name=""/>
-        <p:cNvGrpSpPr/>
-        <p:nvPr/>
-      </p:nvGrpSpPr>
-      <p:grpSpPr>
-        <a:xfrm>
-          <a:off x="0" y="0"/>
-          <a:ext cx="0" cy="0"/>
-          <a:chOff x="0" y="0"/>
-          <a:chExt cx="0" cy="0"/>
-        </a:xfrm>
-      </p:grpSpPr>
-      <p:sp>
-        <p:nvSpPr>
-          <p:cNvPr id="2" name="Textfeld 1"/>
-          <p:cNvSpPr txBox="1"/>
-          <p:nvPr/>
-        </p:nvSpPr>
-        <p:spPr>
-          <a:xfrm>
-            <a:off x="0" y="0"/>
-            <a:ext cx="9905999" cy="6217087"/>
-          </a:xfrm>
-          <a:prstGeom prst="rect">
-            <a:avLst/>
-          </a:prstGeom>
-          <a:noFill/>
-        </p:spPr>
-        <p:txBody>
-          <a:bodyPr wrap="square" rtlCol="0">
-            <a:spAutoFit/>
-          </a:bodyPr>
-          <a:lstStyle/>
-          <a:p>
-            <a:pPr algn="ctr"/>
-            <a:r>
-              <a:rPr lang="de-AT" sz="19900" b="1" dirty="0"/>
-              <a:t>ID</a:t>
-            </a:r>
-          </a:p>
-          <a:p>
-            <a:pPr algn="ctr"/>
-            <a:r>
-              <a:rPr lang="de-AT" sz="19900" b="1" dirty="0"/>
-              <a:t>1 - 19</a:t>
-            </a:r>
-            <a:endParaRPr lang="de-AT" sz="23900" b="1" dirty="0"/>
-          </a:p>
-        </p:txBody>
-      </p:sp>
-      <p:sp>
-        <p:nvSpPr>
-          <p:cNvPr id="3" name="Rechteck 2">
-            <a:extLst>
-              <a:ext uri="{FF2B5EF4-FFF2-40B4-BE49-F238E27FC236}">
-                <a16:creationId xmlns:a16="http://schemas.microsoft.com/office/drawing/2014/main" id="{8C74AAB0-481A-410D-B16C-BFB94CB9706D}"/>
-              </a:ext>
-            </a:extLst>
-          </p:cNvPr>
-          <p:cNvSpPr/>
-          <p:nvPr/>
-        </p:nvSpPr>
-        <p:spPr>
-          <a:xfrm>
-            <a:off x="265814" y="191386"/>
-            <a:ext cx="9409814" cy="6464595"/>
-          </a:xfrm>
-          <a:prstGeom prst="rect">
-            <a:avLst/>
-          </a:prstGeom>
-          <a:noFill/>
-          <a:ln w="127000">
-            <a:solidFill>
-              <a:srgbClr val="00B050"/>
-            </a:solidFill>
-          </a:ln>
-        </p:spPr>
-        <p:style>
-          <a:lnRef idx="2">
-            <a:schemeClr val="accent1">
-              <a:shade val="50000"/>
-            </a:schemeClr>
-          </a:lnRef>
-          <a:fillRef idx="1">
-            <a:schemeClr val="accent1"/>
-          </a:fillRef>
-          <a:effectRef idx="0">
-            <a:schemeClr val="accent1"/>
-          </a:effectRef>
-          <a:fontRef idx="minor">
-            <a:schemeClr val="lt1"/>
-          </a:fontRef>
-        </p:style>
-        <p:txBody>
-          <a:bodyPr rtlCol="0" anchor="ctr"/>
-          <a:lstStyle/>
-          <a:p>
-            <a:pPr algn="ctr"/>
-            <a:endParaRPr lang="de-AT"/>
-          </a:p>
-        </p:txBody>
-      </p:sp>
-    </p:spTree>
-    <p:extLst>
-      <p:ext uri="{BB962C8B-B14F-4D97-AF65-F5344CB8AC3E}">
-        <p14:creationId xmlns:p14="http://schemas.microsoft.com/office/powerpoint/2010/main" val="723433819"/>
-      </p:ext>
-    </p:extLst>
-  </p:cSld>
-  <p:clrMapOvr>
-    <a:masterClrMapping/>
-  </p:clrMapOvr>
-</p:sld>
-</file>
-
-<file path=ppt/slides/slide6.xml><?xml version="1.0" encoding="utf-8"?>
-<p:sld xmlns:a="http://schemas.openxmlformats.org/drawingml/2006/main" xmlns:r="http://schemas.openxmlformats.org/officeDocument/2006/relationships" xmlns:p="http://schemas.openxmlformats.org/presentationml/2006/main">
-  <p:cSld>
-    <p:spTree>
-      <p:nvGrpSpPr>
-        <p:cNvPr id="1" name=""/>
-        <p:cNvGrpSpPr/>
-        <p:nvPr/>
-      </p:nvGrpSpPr>
-      <p:grpSpPr>
-        <a:xfrm>
-          <a:off x="0" y="0"/>
-          <a:ext cx="0" cy="0"/>
-          <a:chOff x="0" y="0"/>
-          <a:chExt cx="0" cy="0"/>
-        </a:xfrm>
-      </p:grpSpPr>
-      <p:sp>
-        <p:nvSpPr>
-          <p:cNvPr id="2" name="Textfeld 1"/>
-          <p:cNvSpPr txBox="1"/>
-          <p:nvPr/>
-        </p:nvSpPr>
-        <p:spPr>
-          <a:xfrm>
-            <a:off x="0" y="0"/>
-            <a:ext cx="9905999" cy="6217087"/>
-          </a:xfrm>
-          <a:prstGeom prst="rect">
-            <a:avLst/>
-          </a:prstGeom>
-          <a:noFill/>
-        </p:spPr>
-        <p:txBody>
-          <a:bodyPr wrap="square" rtlCol="0">
-            <a:spAutoFit/>
-          </a:bodyPr>
-          <a:lstStyle/>
-          <a:p>
-            <a:pPr algn="ctr"/>
-            <a:r>
-              <a:rPr lang="de-AT" sz="19900" b="1" dirty="0"/>
-              <a:t>ID</a:t>
-            </a:r>
-          </a:p>
-          <a:p>
-            <a:pPr algn="ctr"/>
-            <a:r>
-              <a:rPr lang="de-AT" sz="19900" b="1" dirty="0"/>
-              <a:t>20 - 39</a:t>
-            </a:r>
-            <a:endParaRPr lang="de-AT" sz="23900" b="1" dirty="0"/>
-          </a:p>
-        </p:txBody>
-      </p:sp>
-      <p:sp>
-        <p:nvSpPr>
-          <p:cNvPr id="3" name="Rechteck 2">
-            <a:extLst>
-              <a:ext uri="{FF2B5EF4-FFF2-40B4-BE49-F238E27FC236}">
-                <a16:creationId xmlns:a16="http://schemas.microsoft.com/office/drawing/2014/main" id="{8C74AAB0-481A-410D-B16C-BFB94CB9706D}"/>
-              </a:ext>
-            </a:extLst>
-          </p:cNvPr>
-          <p:cNvSpPr/>
-          <p:nvPr/>
-        </p:nvSpPr>
-        <p:spPr>
-          <a:xfrm>
-            <a:off x="265814" y="191386"/>
-            <a:ext cx="9409814" cy="6464595"/>
-          </a:xfrm>
-          <a:prstGeom prst="rect">
-            <a:avLst/>
-          </a:prstGeom>
-          <a:noFill/>
-          <a:ln w="127000">
-            <a:solidFill>
-              <a:srgbClr val="00B050"/>
-            </a:solidFill>
-          </a:ln>
-        </p:spPr>
-        <p:style>
-          <a:lnRef idx="2">
-            <a:schemeClr val="accent1">
-              <a:shade val="50000"/>
-            </a:schemeClr>
-          </a:lnRef>
-          <a:fillRef idx="1">
-            <a:schemeClr val="accent1"/>
-          </a:fillRef>
-          <a:effectRef idx="0">
-            <a:schemeClr val="accent1"/>
-          </a:effectRef>
-          <a:fontRef idx="minor">
-            <a:schemeClr val="lt1"/>
-          </a:fontRef>
-        </p:style>
-        <p:txBody>
-          <a:bodyPr rtlCol="0" anchor="ctr"/>
-          <a:lstStyle/>
-          <a:p>
-            <a:pPr algn="ctr"/>
-            <a:endParaRPr lang="de-AT"/>
-          </a:p>
-        </p:txBody>
-      </p:sp>
-    </p:spTree>
-    <p:extLst>
-      <p:ext uri="{BB962C8B-B14F-4D97-AF65-F5344CB8AC3E}">
-        <p14:creationId xmlns:p14="http://schemas.microsoft.com/office/powerpoint/2010/main" val="2226886063"/>
-      </p:ext>
-    </p:extLst>
-  </p:cSld>
-  <p:clrMapOvr>
-    <a:masterClrMapping/>
-  </p:clrMapOvr>
-</p:sld>
-</file>
-
-<file path=ppt/slides/slide7.xml><?xml version="1.0" encoding="utf-8"?>
-<p:sld xmlns:a="http://schemas.openxmlformats.org/drawingml/2006/main" xmlns:r="http://schemas.openxmlformats.org/officeDocument/2006/relationships" xmlns:p="http://schemas.openxmlformats.org/presentationml/2006/main">
-  <p:cSld>
-    <p:spTree>
-      <p:nvGrpSpPr>
-        <p:cNvPr id="1" name=""/>
-        <p:cNvGrpSpPr/>
-        <p:nvPr/>
-      </p:nvGrpSpPr>
-      <p:grpSpPr>
-        <a:xfrm>
-          <a:off x="0" y="0"/>
-          <a:ext cx="0" cy="0"/>
-          <a:chOff x="0" y="0"/>
-          <a:chExt cx="0" cy="0"/>
-        </a:xfrm>
-      </p:grpSpPr>
-      <p:sp>
-        <p:nvSpPr>
-          <p:cNvPr id="2" name="Textfeld 1"/>
-          <p:cNvSpPr txBox="1"/>
-          <p:nvPr/>
-        </p:nvSpPr>
-        <p:spPr>
-          <a:xfrm>
-            <a:off x="0" y="0"/>
-            <a:ext cx="9905999" cy="6217087"/>
-          </a:xfrm>
-          <a:prstGeom prst="rect">
-            <a:avLst/>
-          </a:prstGeom>
-          <a:noFill/>
-        </p:spPr>
-        <p:txBody>
-          <a:bodyPr wrap="square" rtlCol="0">
-            <a:spAutoFit/>
-          </a:bodyPr>
-          <a:lstStyle/>
-          <a:p>
-            <a:pPr algn="ctr"/>
-            <a:r>
-              <a:rPr lang="de-AT" sz="19900" b="1" dirty="0"/>
-              <a:t>ID</a:t>
-            </a:r>
-          </a:p>
-          <a:p>
-            <a:pPr algn="ctr"/>
-            <a:r>
-              <a:rPr lang="de-AT" sz="19900" b="1" dirty="0"/>
-              <a:t>40 - 59</a:t>
-            </a:r>
-            <a:endParaRPr lang="de-AT" sz="23900" b="1" dirty="0"/>
-          </a:p>
-        </p:txBody>
-      </p:sp>
-      <p:sp>
-        <p:nvSpPr>
-          <p:cNvPr id="3" name="Rechteck 2">
-            <a:extLst>
-              <a:ext uri="{FF2B5EF4-FFF2-40B4-BE49-F238E27FC236}">
-                <a16:creationId xmlns:a16="http://schemas.microsoft.com/office/drawing/2014/main" id="{8C74AAB0-481A-410D-B16C-BFB94CB9706D}"/>
-              </a:ext>
-            </a:extLst>
-          </p:cNvPr>
-          <p:cNvSpPr/>
-          <p:nvPr/>
-        </p:nvSpPr>
-        <p:spPr>
-          <a:xfrm>
-            <a:off x="265814" y="191386"/>
-            <a:ext cx="9409814" cy="6464595"/>
-          </a:xfrm>
-          <a:prstGeom prst="rect">
-            <a:avLst/>
-          </a:prstGeom>
-          <a:noFill/>
-          <a:ln w="127000">
-            <a:solidFill>
-              <a:srgbClr val="00B050"/>
-            </a:solidFill>
-          </a:ln>
-        </p:spPr>
-        <p:style>
-          <a:lnRef idx="2">
-            <a:schemeClr val="accent1">
-              <a:shade val="50000"/>
-            </a:schemeClr>
-          </a:lnRef>
-          <a:fillRef idx="1">
-            <a:schemeClr val="accent1"/>
-          </a:fillRef>
-          <a:effectRef idx="0">
-            <a:schemeClr val="accent1"/>
-          </a:effectRef>
-          <a:fontRef idx="minor">
-            <a:schemeClr val="lt1"/>
-          </a:fontRef>
-        </p:style>
-        <p:txBody>
-          <a:bodyPr rtlCol="0" anchor="ctr"/>
-          <a:lstStyle/>
-          <a:p>
-            <a:pPr algn="ctr"/>
-            <a:endParaRPr lang="de-AT"/>
-          </a:p>
-        </p:txBody>
-      </p:sp>
-    </p:spTree>
-    <p:extLst>
-      <p:ext uri="{BB962C8B-B14F-4D97-AF65-F5344CB8AC3E}">
-        <p14:creationId xmlns:p14="http://schemas.microsoft.com/office/powerpoint/2010/main" val="614212359"/>
-      </p:ext>
-    </p:extLst>
-  </p:cSld>
-  <p:clrMapOvr>
-    <a:masterClrMapping/>
-  </p:clrMapOvr>
-</p:sld>
-</file>
-
-<file path=ppt/slides/slide8.xml><?xml version="1.0" encoding="utf-8"?>
-<p:sld xmlns:a="http://schemas.openxmlformats.org/drawingml/2006/main" xmlns:r="http://schemas.openxmlformats.org/officeDocument/2006/relationships" xmlns:p="http://schemas.openxmlformats.org/presentationml/2006/main">
-  <p:cSld>
-    <p:spTree>
-      <p:nvGrpSpPr>
-        <p:cNvPr id="1" name=""/>
-        <p:cNvGrpSpPr/>
-        <p:nvPr/>
-      </p:nvGrpSpPr>
-      <p:grpSpPr>
-        <a:xfrm>
-          <a:off x="0" y="0"/>
-          <a:ext cx="0" cy="0"/>
-          <a:chOff x="0" y="0"/>
-          <a:chExt cx="0" cy="0"/>
-        </a:xfrm>
-      </p:grpSpPr>
-      <p:sp>
-        <p:nvSpPr>
-          <p:cNvPr id="2" name="Textfeld 1"/>
-          <p:cNvSpPr txBox="1"/>
-          <p:nvPr/>
-        </p:nvSpPr>
-        <p:spPr>
-          <a:xfrm>
-            <a:off x="0" y="0"/>
-            <a:ext cx="9905999" cy="6217087"/>
-          </a:xfrm>
-          <a:prstGeom prst="rect">
-            <a:avLst/>
-          </a:prstGeom>
-          <a:noFill/>
-        </p:spPr>
-        <p:txBody>
-          <a:bodyPr wrap="square" rtlCol="0">
-            <a:spAutoFit/>
-          </a:bodyPr>
-          <a:lstStyle/>
-          <a:p>
-            <a:pPr algn="ctr"/>
-            <a:r>
-              <a:rPr lang="de-AT" sz="19900" b="1" dirty="0"/>
-              <a:t>ID</a:t>
-            </a:r>
-          </a:p>
-          <a:p>
-            <a:pPr algn="ctr"/>
-            <a:r>
-              <a:rPr lang="de-AT" sz="19900" b="1" dirty="0"/>
-              <a:t>60 - 79</a:t>
-            </a:r>
-            <a:endParaRPr lang="de-AT" sz="23900" b="1" dirty="0"/>
-          </a:p>
-        </p:txBody>
-      </p:sp>
-      <p:sp>
-        <p:nvSpPr>
-          <p:cNvPr id="3" name="Rechteck 2">
-            <a:extLst>
-              <a:ext uri="{FF2B5EF4-FFF2-40B4-BE49-F238E27FC236}">
-                <a16:creationId xmlns:a16="http://schemas.microsoft.com/office/drawing/2014/main" id="{8C74AAB0-481A-410D-B16C-BFB94CB9706D}"/>
-              </a:ext>
-            </a:extLst>
-          </p:cNvPr>
-          <p:cNvSpPr/>
-          <p:nvPr/>
-        </p:nvSpPr>
-        <p:spPr>
-          <a:xfrm>
-            <a:off x="265814" y="191386"/>
-            <a:ext cx="9409814" cy="6464595"/>
-          </a:xfrm>
-          <a:prstGeom prst="rect">
-            <a:avLst/>
-          </a:prstGeom>
-          <a:noFill/>
-          <a:ln w="127000">
-            <a:solidFill>
-              <a:srgbClr val="00B050"/>
-            </a:solidFill>
-          </a:ln>
-        </p:spPr>
-        <p:style>
-          <a:lnRef idx="2">
-            <a:schemeClr val="accent1">
-              <a:shade val="50000"/>
-            </a:schemeClr>
-          </a:lnRef>
-          <a:fillRef idx="1">
-            <a:schemeClr val="accent1"/>
-          </a:fillRef>
-          <a:effectRef idx="0">
-            <a:schemeClr val="accent1"/>
-          </a:effectRef>
-          <a:fontRef idx="minor">
-            <a:schemeClr val="lt1"/>
-          </a:fontRef>
-        </p:style>
-        <p:txBody>
-          <a:bodyPr rtlCol="0" anchor="ctr"/>
-          <a:lstStyle/>
-          <a:p>
-            <a:pPr algn="ctr"/>
-            <a:endParaRPr lang="de-AT"/>
-          </a:p>
-        </p:txBody>
-      </p:sp>
-    </p:spTree>
-    <p:extLst>
-      <p:ext uri="{BB962C8B-B14F-4D97-AF65-F5344CB8AC3E}">
-        <p14:creationId xmlns:p14="http://schemas.microsoft.com/office/powerpoint/2010/main" val="2030515327"/>
-      </p:ext>
-    </p:extLst>
-  </p:cSld>
-  <p:clrMapOvr>
-    <a:masterClrMapping/>
-  </p:clrMapOvr>
-</p:sld>
-</file>
-
-<file path=ppt/slides/slide9.xml><?xml version="1.0" encoding="utf-8"?>
-<p:sld xmlns:a="http://schemas.openxmlformats.org/drawingml/2006/main" xmlns:r="http://schemas.openxmlformats.org/officeDocument/2006/relationships" xmlns:p="http://schemas.openxmlformats.org/presentationml/2006/main">
-  <p:cSld>
-    <p:spTree>
-      <p:nvGrpSpPr>
-        <p:cNvPr id="1" name=""/>
-        <p:cNvGrpSpPr/>
-        <p:nvPr/>
-      </p:nvGrpSpPr>
-      <p:grpSpPr>
-        <a:xfrm>
-          <a:off x="0" y="0"/>
-          <a:ext cx="0" cy="0"/>
-          <a:chOff x="0" y="0"/>
-          <a:chExt cx="0" cy="0"/>
-        </a:xfrm>
-      </p:grpSpPr>
-      <p:sp>
-        <p:nvSpPr>
-          <p:cNvPr id="2" name="Textfeld 1"/>
-          <p:cNvSpPr txBox="1"/>
-          <p:nvPr/>
-        </p:nvSpPr>
-        <p:spPr>
-          <a:xfrm>
-            <a:off x="0" y="0"/>
-            <a:ext cx="9905999" cy="6217087"/>
-          </a:xfrm>
-          <a:prstGeom prst="rect">
-            <a:avLst/>
-          </a:prstGeom>
-          <a:noFill/>
-        </p:spPr>
-        <p:txBody>
-          <a:bodyPr wrap="square" rtlCol="0">
-            <a:spAutoFit/>
-          </a:bodyPr>
-          <a:lstStyle/>
-          <a:p>
-            <a:pPr algn="ctr"/>
-            <a:r>
-              <a:rPr lang="de-AT" sz="19900" b="1" dirty="0"/>
-              <a:t>ID</a:t>
-            </a:r>
-          </a:p>
-          <a:p>
-            <a:pPr algn="ctr"/>
-            <a:r>
-              <a:rPr lang="de-AT" sz="19900" b="1" dirty="0"/>
-              <a:t>80 - 99</a:t>
-            </a:r>
-            <a:endParaRPr lang="de-AT" sz="23900" b="1" dirty="0"/>
-          </a:p>
-        </p:txBody>
-      </p:sp>
-      <p:sp>
-        <p:nvSpPr>
-          <p:cNvPr id="3" name="Rechteck 2">
-            <a:extLst>
-              <a:ext uri="{FF2B5EF4-FFF2-40B4-BE49-F238E27FC236}">
-                <a16:creationId xmlns:a16="http://schemas.microsoft.com/office/drawing/2014/main" id="{8C74AAB0-481A-410D-B16C-BFB94CB9706D}"/>
-              </a:ext>
-            </a:extLst>
-          </p:cNvPr>
-          <p:cNvSpPr/>
-          <p:nvPr/>
-        </p:nvSpPr>
-        <p:spPr>
-          <a:xfrm>
-            <a:off x="265814" y="191386"/>
-            <a:ext cx="9409814" cy="6464595"/>
-          </a:xfrm>
-          <a:prstGeom prst="rect">
-            <a:avLst/>
-          </a:prstGeom>
-          <a:noFill/>
-          <a:ln w="127000">
-            <a:solidFill>
-              <a:srgbClr val="00B050"/>
-            </a:solidFill>
-          </a:ln>
-        </p:spPr>
-        <p:style>
-          <a:lnRef idx="2">
-            <a:schemeClr val="accent1">
-              <a:shade val="50000"/>
-            </a:schemeClr>
-          </a:lnRef>
-          <a:fillRef idx="1">
-            <a:schemeClr val="accent1"/>
-          </a:fillRef>
-          <a:effectRef idx="0">
-            <a:schemeClr val="accent1"/>
-          </a:effectRef>
-          <a:fontRef idx="minor">
-            <a:schemeClr val="lt1"/>
-          </a:fontRef>
-        </p:style>
-        <p:txBody>
-          <a:bodyPr rtlCol="0" anchor="ctr"/>
-          <a:lstStyle/>
-          <a:p>
-            <a:pPr algn="ctr"/>
-            <a:endParaRPr lang="de-AT"/>
-          </a:p>
-        </p:txBody>
-      </p:sp>
-    </p:spTree>
-    <p:extLst>
-      <p:ext uri="{BB962C8B-B14F-4D97-AF65-F5344CB8AC3E}">
-        <p14:creationId xmlns:p14="http://schemas.microsoft.com/office/powerpoint/2010/main" val="3573896445"/>
       </p:ext>
     </p:extLst>
   </p:cSld>
@@ -7481,6 +4251,15 @@
 </file>
 
 <file path=customXml/item1.xml><?xml version="1.0" encoding="utf-8"?>
+<?mso-contentType ?>
+<FormTemplates xmlns="http://schemas.microsoft.com/sharepoint/v3/contenttype/forms">
+  <Display>DocumentLibraryForm</Display>
+  <Edit>DocumentLibraryForm</Edit>
+  <New>DocumentLibraryForm</New>
+</FormTemplates>
+</file>
+
+<file path=customXml/item2.xml><?xml version="1.0" encoding="utf-8"?>
 <ct:contentTypeSchema xmlns:ct="http://schemas.microsoft.com/office/2006/metadata/contentType" xmlns:ma="http://schemas.microsoft.com/office/2006/metadata/properties/metaAttributes" ct:_="" ma:_="" ma:contentTypeName="Dokument" ma:contentTypeID="0x0101000AFBE7267A267543B727E911F813E965" ma:contentTypeVersion="7" ma:contentTypeDescription="Ein neues Dokument erstellen." ma:contentTypeScope="" ma:versionID="363c7014d3b413d763f099b9f679aa70">
   <xsd:schema xmlns:xsd="http://www.w3.org/2001/XMLSchema" xmlns:xs="http://www.w3.org/2001/XMLSchema" xmlns:p="http://schemas.microsoft.com/office/2006/metadata/properties" xmlns:ns2="5e628b3f-b38c-48f4-8733-272641f99b14" targetNamespace="http://schemas.microsoft.com/office/2006/metadata/properties" ma:root="true" ma:fieldsID="42cae8211bfee65259dd7171e132c932" ns2:_="">
     <xsd:import namespace="5e628b3f-b38c-48f4-8733-272641f99b14"/>
@@ -7644,15 +4423,6 @@
 </ct:contentTypeSchema>
 </file>
 
-<file path=customXml/item2.xml><?xml version="1.0" encoding="utf-8"?>
-<?mso-contentType ?>
-<FormTemplates xmlns="http://schemas.microsoft.com/sharepoint/v3/contenttype/forms">
-  <Display>DocumentLibraryForm</Display>
-  <Edit>DocumentLibraryForm</Edit>
-  <New>DocumentLibraryForm</New>
-</FormTemplates>
-</file>
-
 <file path=customXml/item3.xml><?xml version="1.0" encoding="utf-8"?>
 <p:properties xmlns:p="http://schemas.microsoft.com/office/2006/metadata/properties" xmlns:xsi="http://www.w3.org/2001/XMLSchema-instance" xmlns:pc="http://schemas.microsoft.com/office/infopath/2007/PartnerControls">
   <documentManagement/>
@@ -7660,6 +4430,14 @@
 </file>
 
 <file path=customXml/itemProps1.xml><?xml version="1.0" encoding="utf-8"?>
+<ds:datastoreItem xmlns:ds="http://schemas.openxmlformats.org/officeDocument/2006/customXml" ds:itemID="{D2B55222-F127-4A21-9AB0-F27BDCA9606F}">
+  <ds:schemaRefs>
+    <ds:schemaRef ds:uri="http://schemas.microsoft.com/sharepoint/v3/contenttype/forms"/>
+  </ds:schemaRefs>
+</ds:datastoreItem>
+</file>
+
+<file path=customXml/itemProps2.xml><?xml version="1.0" encoding="utf-8"?>
 <ds:datastoreItem xmlns:ds="http://schemas.openxmlformats.org/officeDocument/2006/customXml" ds:itemID="{3DB81CD8-63B6-4579-99B1-A621C924B573}">
   <ds:schemaRefs>
     <ds:schemaRef ds:uri="http://schemas.microsoft.com/office/2006/metadata/contentType"/>
@@ -7673,14 +4451,6 @@
     <ds:schemaRef ds:uri="http://purl.org/dc/elements/1.1/"/>
     <ds:schemaRef ds:uri="http://purl.org/dc/terms/"/>
     <ds:schemaRef ds:uri="http://schemas.microsoft.com/internal/obd"/>
-  </ds:schemaRefs>
-</ds:datastoreItem>
-</file>
-
-<file path=customXml/itemProps2.xml><?xml version="1.0" encoding="utf-8"?>
-<ds:datastoreItem xmlns:ds="http://schemas.openxmlformats.org/officeDocument/2006/customXml" ds:itemID="{D2B55222-F127-4A21-9AB0-F27BDCA9606F}">
-  <ds:schemaRefs>
-    <ds:schemaRef ds:uri="http://schemas.microsoft.com/sharepoint/v3/contenttype/forms"/>
   </ds:schemaRefs>
 </ds:datastoreItem>
 </file>
